--- a/docs/M5자료/M5. 나만의_업무_혁신_PoC_아이디어기획서 Work Sheet.pptx
+++ b/docs/M5자료/M5. 나만의_업무_혁신_PoC_아이디어기획서 Work Sheet.pptx
@@ -1,8 +1,8 @@
 
 <file path=ppt/presentation.xml><?xml version="1.0" encoding="utf-8"?>
-<p:presentation xmlns:a="http://schemas.openxmlformats.org/drawingml/2006/main" xmlns:r="http://schemas.openxmlformats.org/officeDocument/2006/relationships" xmlns:p="http://schemas.openxmlformats.org/presentationml/2006/main" saveSubsetFonts="1" autoCompressPictures="0">
+<p:presentation xmlns:a="http://schemas.openxmlformats.org/drawingml/2006/main" xmlns:r="http://schemas.openxmlformats.org/officeDocument/2006/relationships" xmlns:p="http://schemas.openxmlformats.org/presentationml/2006/main" autoCompressPictures="0">
   <p:sldMasterIdLst>
-    <p:sldMasterId id="2147483648" r:id="rId1"/>
+    <p:sldMasterId id="2147483650" r:id="rId1"/>
   </p:sldMasterIdLst>
   <p:notesMasterIdLst>
     <p:notesMasterId r:id="rId3"/>
@@ -135,13 +135,9 @@
         </a:xfrm>
       </p:grpSpPr>
     </p:spTree>
-    <p:extLst>
-      <p:ext uri="{BB962C8B-B14F-4D97-AF65-F5344CB8AC3E}">
-        <p14:creationId xmlns:p14="http://schemas.microsoft.com/office/powerpoint/2010/main" val="365130551"/>
-      </p:ext>
-    </p:extLst>
   </p:cSld>
   <p:clrMap bg1="lt1" tx1="dk1" bg2="lt2" tx2="dk2" accent1="accent1" accent2="accent2" accent3="accent3" accent4="accent4" accent5="accent5" accent6="accent6" hlink="hlink" folHlink="folHlink"/>
+  <p:hf hdr="0" ftr="0" dt="0"/>
   <p:notesStyle>
     <a:lvl1pPr marL="0" algn="l" defTabSz="914400" rtl="0" eaLnBrk="1" latinLnBrk="1" hangingPunct="1">
       <a:defRPr sz="1200" kern="1200">
@@ -258,7 +254,7 @@
         <p:nvSpPr>
           <p:cNvPr id="2" name="Slide Image Placeholder 1"/>
           <p:cNvSpPr>
-            <a:spLocks noGrp="1" noRot="1" noChangeAspect="1"/>
+            <a:spLocks noGrp="1" noRot="1" noChangeAspect="1" noTextEdit="1"/>
           </p:cNvSpPr>
           <p:nvPr>
             <p:ph type="sldImg"/>
@@ -281,7 +277,10 @@
           <a:bodyPr/>
           <a:lstStyle/>
           <a:p>
-            <a:endParaRPr lang="en-US" dirty="0"/>
+            <a:pPr lvl="0">
+              <a:defRPr/>
+            </a:pPr>
+            <a:endParaRPr lang="ko-KR" altLang="en-US"/>
           </a:p>
         </p:txBody>
       </p:sp>
@@ -300,8 +299,14 @@
           <a:bodyPr/>
           <a:lstStyle/>
           <a:p>
+            <a:pPr lvl="0">
+              <a:defRPr/>
+            </a:pPr>
             <a:fld id="{F7021451-1387-4CA6-816F-3879F97B5CBC}" type="slidenum">
               <a:rPr lang="en-US"/>
+              <a:pPr lvl="0">
+                <a:defRPr/>
+              </a:pPr>
               <a:t>1</a:t>
             </a:fld>
             <a:endParaRPr lang="en-US"/>
@@ -309,11 +314,6 @@
         </p:txBody>
       </p:sp>
     </p:spTree>
-    <p:extLst>
-      <p:ext uri="{BB962C8B-B14F-4D97-AF65-F5344CB8AC3E}">
-        <p14:creationId xmlns:p14="http://schemas.microsoft.com/office/powerpoint/2010/main" val="1024086991"/>
-      </p:ext>
-    </p:extLst>
   </p:cSld>
   <p:clrMapOvr>
     <a:masterClrMapping/>
@@ -688,7 +688,7 @@
           <a:bodyPr anchor="ctr"/>
           <a:lstStyle/>
           <a:p>
-            <a:pPr marL="0" marR="0" lvl="0" indent="0" algn="l" defTabSz="914400" rtl="0" eaLnBrk="1" fontAlgn="auto" latinLnBrk="0" hangingPunct="1">
+            <a:pPr marL="0" marR="0" lvl="0" indent="0" algn="l" defTabSz="914400" rtl="0" eaLnBrk="1" latinLnBrk="0" hangingPunct="1">
               <a:lnSpc>
                 <a:spcPct val="100000"/>
               </a:lnSpc>
@@ -699,207 +699,54 @@
                 <a:spcPts val="0"/>
               </a:spcAft>
               <a:buClrTx/>
-              <a:buSzTx/>
               <a:buFontTx/>
               <a:buNone/>
-              <a:tabLst/>
               <a:defRPr/>
             </a:pPr>
             <a:r>
-              <a:rPr kumimoji="0" lang="en-US" altLang="ko-KR" sz="2400" b="1" i="0" u="none" strike="noStrike" kern="0" cap="none" spc="-19" normalizeH="0" baseline="0" noProof="0" dirty="0">
-                <a:ln>
-                  <a:noFill/>
-                </a:ln>
+              <a:rPr kumimoji="0" lang="en-US" altLang="ko-KR" sz="2400" b="1" i="0" u="none" strike="noStrike" kern="0" cap="none" spc="-19" normalizeH="0" baseline="0">
                 <a:solidFill>
                   <a:srgbClr val="FFFFFF"/>
                 </a:solidFill>
                 <a:effectLst/>
                 <a:uLnTx/>
                 <a:uFillTx/>
-                <a:latin typeface="맑은 고딕" panose="020B0503020000020004" pitchFamily="50" charset="-127"/>
-                <a:ea typeface="맑은 고딕" panose="020B0503020000020004" pitchFamily="50" charset="-127"/>
-                <a:cs typeface="Pretendard Variable" pitchFamily="34" charset="-120"/>
+                <a:latin typeface="맑은 고딕"/>
+                <a:ea typeface="맑은 고딕"/>
+                <a:cs typeface="Pretendard Variable"/>
               </a:rPr>
-              <a:t>  M5. </a:t>
+              <a:t>  M5. 나만의 업무 혁신 PoC_</a:t>
             </a:r>
             <a:r>
-              <a:rPr kumimoji="0" lang="en-US" altLang="ko-KR" sz="2400" b="1" i="0" u="none" strike="noStrike" kern="0" cap="none" spc="-19" normalizeH="0" baseline="0" noProof="0" dirty="0" err="1">
-                <a:ln>
-                  <a:noFill/>
-                </a:ln>
-                <a:solidFill>
-                  <a:srgbClr val="FFFFFF"/>
-                </a:solidFill>
-                <a:effectLst/>
-                <a:uLnTx/>
-                <a:uFillTx/>
-                <a:latin typeface="맑은 고딕" panose="020B0503020000020004" pitchFamily="50" charset="-127"/>
-                <a:ea typeface="맑은 고딕" panose="020B0503020000020004" pitchFamily="50" charset="-127"/>
-                <a:cs typeface="Pretendard Variable" pitchFamily="34" charset="-120"/>
-              </a:rPr>
-              <a:t>나만의</a:t>
-            </a:r>
-            <a:r>
-              <a:rPr kumimoji="0" lang="en-US" altLang="ko-KR" sz="2400" b="1" i="0" u="none" strike="noStrike" kern="0" cap="none" spc="-19" normalizeH="0" baseline="0" noProof="0" dirty="0">
-                <a:ln>
-                  <a:noFill/>
-                </a:ln>
-                <a:solidFill>
-                  <a:srgbClr val="FFFFFF"/>
-                </a:solidFill>
-                <a:effectLst/>
-                <a:uLnTx/>
-                <a:uFillTx/>
-                <a:latin typeface="맑은 고딕" panose="020B0503020000020004" pitchFamily="50" charset="-127"/>
-                <a:ea typeface="맑은 고딕" panose="020B0503020000020004" pitchFamily="50" charset="-127"/>
-                <a:cs typeface="Pretendard Variable" pitchFamily="34" charset="-120"/>
-              </a:rPr>
-              <a:t> </a:t>
-            </a:r>
-            <a:r>
-              <a:rPr kumimoji="0" lang="en-US" altLang="ko-KR" sz="2400" b="1" i="0" u="none" strike="noStrike" kern="0" cap="none" spc="-19" normalizeH="0" baseline="0" noProof="0" dirty="0" err="1">
-                <a:ln>
-                  <a:noFill/>
-                </a:ln>
-                <a:solidFill>
-                  <a:srgbClr val="FFFFFF"/>
-                </a:solidFill>
-                <a:effectLst/>
-                <a:uLnTx/>
-                <a:uFillTx/>
-                <a:latin typeface="맑은 고딕" panose="020B0503020000020004" pitchFamily="50" charset="-127"/>
-                <a:ea typeface="맑은 고딕" panose="020B0503020000020004" pitchFamily="50" charset="-127"/>
-                <a:cs typeface="Pretendard Variable" pitchFamily="34" charset="-120"/>
-              </a:rPr>
-              <a:t>업무</a:t>
-            </a:r>
-            <a:r>
-              <a:rPr kumimoji="0" lang="en-US" altLang="ko-KR" sz="2400" b="1" i="0" u="none" strike="noStrike" kern="0" cap="none" spc="-19" normalizeH="0" baseline="0" noProof="0" dirty="0">
-                <a:ln>
-                  <a:noFill/>
-                </a:ln>
-                <a:solidFill>
-                  <a:srgbClr val="FFFFFF"/>
-                </a:solidFill>
-                <a:effectLst/>
-                <a:uLnTx/>
-                <a:uFillTx/>
-                <a:latin typeface="맑은 고딕" panose="020B0503020000020004" pitchFamily="50" charset="-127"/>
-                <a:ea typeface="맑은 고딕" panose="020B0503020000020004" pitchFamily="50" charset="-127"/>
-                <a:cs typeface="Pretendard Variable" pitchFamily="34" charset="-120"/>
-              </a:rPr>
-              <a:t> </a:t>
-            </a:r>
-            <a:r>
-              <a:rPr kumimoji="0" lang="en-US" altLang="ko-KR" sz="2400" b="1" i="0" u="none" strike="noStrike" kern="0" cap="none" spc="-19" normalizeH="0" baseline="0" noProof="0" dirty="0" err="1">
-                <a:ln>
-                  <a:noFill/>
-                </a:ln>
-                <a:solidFill>
-                  <a:srgbClr val="FFFFFF"/>
-                </a:solidFill>
-                <a:effectLst/>
-                <a:uLnTx/>
-                <a:uFillTx/>
-                <a:latin typeface="맑은 고딕" panose="020B0503020000020004" pitchFamily="50" charset="-127"/>
-                <a:ea typeface="맑은 고딕" panose="020B0503020000020004" pitchFamily="50" charset="-127"/>
-                <a:cs typeface="Pretendard Variable" pitchFamily="34" charset="-120"/>
-              </a:rPr>
-              <a:t>혁신</a:t>
-            </a:r>
-            <a:r>
-              <a:rPr kumimoji="0" lang="en-US" altLang="ko-KR" sz="2400" b="1" i="0" u="none" strike="noStrike" kern="0" cap="none" spc="-19" normalizeH="0" baseline="0" noProof="0" dirty="0">
-                <a:ln>
-                  <a:noFill/>
-                </a:ln>
-                <a:solidFill>
-                  <a:srgbClr val="FFFFFF"/>
-                </a:solidFill>
-                <a:effectLst/>
-                <a:uLnTx/>
-                <a:uFillTx/>
-                <a:latin typeface="맑은 고딕" panose="020B0503020000020004" pitchFamily="50" charset="-127"/>
-                <a:ea typeface="맑은 고딕" panose="020B0503020000020004" pitchFamily="50" charset="-127"/>
-                <a:cs typeface="Pretendard Variable" pitchFamily="34" charset="-120"/>
-              </a:rPr>
-              <a:t> </a:t>
-            </a:r>
-            <a:r>
-              <a:rPr kumimoji="0" lang="en-US" altLang="ko-KR" sz="2400" b="1" i="0" u="none" strike="noStrike" kern="0" cap="none" spc="-19" normalizeH="0" baseline="0" noProof="0" dirty="0" err="1">
-                <a:ln>
-                  <a:noFill/>
-                </a:ln>
-                <a:solidFill>
-                  <a:srgbClr val="FFFFFF"/>
-                </a:solidFill>
-                <a:effectLst/>
-                <a:uLnTx/>
-                <a:uFillTx/>
-                <a:latin typeface="맑은 고딕" panose="020B0503020000020004" pitchFamily="50" charset="-127"/>
-                <a:ea typeface="맑은 고딕" panose="020B0503020000020004" pitchFamily="50" charset="-127"/>
-                <a:cs typeface="Pretendard Variable" pitchFamily="34" charset="-120"/>
-              </a:rPr>
-              <a:t>PoC_</a:t>
-            </a:r>
-            <a:r>
-              <a:rPr kumimoji="0" lang="en-US" altLang="ko-KR" b="1" i="0" u="none" strike="noStrike" kern="0" cap="none" spc="-19" normalizeH="0" baseline="0" noProof="0" dirty="0" err="1">
-                <a:ln>
-                  <a:noFill/>
-                </a:ln>
+              <a:rPr kumimoji="0" lang="en-US" altLang="ko-KR" b="1" i="0" u="none" strike="noStrike" kern="0" cap="none" spc="-19" normalizeH="0" baseline="0">
                 <a:solidFill>
                   <a:srgbClr val="B9D2FF"/>
                 </a:solidFill>
                 <a:effectLst/>
                 <a:uLnTx/>
                 <a:uFillTx/>
-                <a:latin typeface="맑은 고딕" panose="020B0503020000020004" pitchFamily="50" charset="-127"/>
-                <a:ea typeface="맑은 고딕" panose="020B0503020000020004" pitchFamily="50" charset="-127"/>
-                <a:cs typeface="Pretendard Variable" pitchFamily="34" charset="-120"/>
+                <a:latin typeface="맑은 고딕"/>
+                <a:ea typeface="맑은 고딕"/>
+                <a:cs typeface="Pretendard Variable"/>
               </a:rPr>
-              <a:t>아이디어기획서</a:t>
+              <a:t>아이디어기획서 Work Sheet</a:t>
             </a:r>
-            <a:r>
-              <a:rPr kumimoji="0" lang="en-US" altLang="ko-KR" b="1" i="0" u="none" strike="noStrike" kern="0" cap="none" spc="-19" normalizeH="0" baseline="0" noProof="0" dirty="0">
-                <a:ln>
-                  <a:noFill/>
-                </a:ln>
-                <a:solidFill>
-                  <a:srgbClr val="B9D2FF"/>
-                </a:solidFill>
-                <a:effectLst/>
-                <a:uLnTx/>
-                <a:uFillTx/>
-                <a:latin typeface="맑은 고딕" panose="020B0503020000020004" pitchFamily="50" charset="-127"/>
-                <a:ea typeface="맑은 고딕" panose="020B0503020000020004" pitchFamily="50" charset="-127"/>
-                <a:cs typeface="Pretendard Variable" pitchFamily="34" charset="-120"/>
-              </a:rPr>
-              <a:t> Work Sheet</a:t>
-            </a:r>
-            <a:endParaRPr kumimoji="0" lang="en-US" altLang="ko-KR" b="1" i="0" u="none" strike="noStrike" kern="1200" cap="none" spc="0" normalizeH="0" baseline="0" noProof="0" dirty="0">
-              <a:ln>
-                <a:noFill/>
-              </a:ln>
+            <a:endParaRPr kumimoji="0" lang="en-US" altLang="ko-KR" b="1" i="0" u="none" strike="noStrike" kern="1200" cap="none" spc="0" normalizeH="0" baseline="0">
               <a:solidFill>
                 <a:prstClr val="black"/>
               </a:solidFill>
               <a:effectLst/>
               <a:uLnTx/>
               <a:uFillTx/>
-              <a:latin typeface="맑은 고딕" panose="020B0503020000020004" pitchFamily="50" charset="-127"/>
-              <a:ea typeface="맑은 고딕" panose="020B0503020000020004" pitchFamily="50" charset="-127"/>
+              <a:latin typeface="맑은 고딕"/>
+              <a:ea typeface="맑은 고딕"/>
             </a:endParaRPr>
           </a:p>
         </p:txBody>
       </p:sp>
       <p:grpSp>
         <p:nvGrpSpPr>
-          <p:cNvPr id="97" name="그룹 96">
-            <a:extLst>
-              <a:ext uri="{FF2B5EF4-FFF2-40B4-BE49-F238E27FC236}">
-                <a16:creationId xmlns:a16="http://schemas.microsoft.com/office/drawing/2014/main" id="{6A3D8F03-3545-9D59-5524-2F70EAE0AA63}"/>
-              </a:ext>
-            </a:extLst>
-          </p:cNvPr>
+          <p:cNvPr id="97" name="그룹 96"/>
           <p:cNvGrpSpPr/>
           <p:nvPr/>
         </p:nvGrpSpPr>
@@ -919,10 +766,12 @@
             </p:cNvPicPr>
             <p:nvPr/>
           </p:nvPicPr>
-          <p:blipFill>
+          <p:blipFill rotWithShape="1">
             <a:blip r:embed="rId3"/>
-            <a:srcRect l="-2083" r="-2083"/>
-            <a:stretch/>
+            <a:srcRect l="-2080" r="-2080"/>
+            <a:stretch>
+              <a:fillRect/>
+            </a:stretch>
           </p:blipFill>
           <p:spPr>
             <a:xfrm>
@@ -936,13 +785,7 @@
         </p:pic>
         <p:grpSp>
           <p:nvGrpSpPr>
-            <p:cNvPr id="94" name="그룹 93">
-              <a:extLst>
-                <a:ext uri="{FF2B5EF4-FFF2-40B4-BE49-F238E27FC236}">
-                  <a16:creationId xmlns:a16="http://schemas.microsoft.com/office/drawing/2014/main" id="{73DAE6EA-F963-78A2-15EC-3312C3BA6734}"/>
-                </a:ext>
-              </a:extLst>
-            </p:cNvPr>
+            <p:cNvPr id="94" name="그룹 93"/>
             <p:cNvGrpSpPr/>
             <p:nvPr/>
           </p:nvGrpSpPr>
@@ -972,37 +815,38 @@
               <a:ln/>
             </p:spPr>
             <p:txBody>
-              <a:bodyPr wrap="none" lIns="0" tIns="0" rIns="0" bIns="0" rtlCol="0" anchor="ctr"/>
+              <a:bodyPr wrap="none" lIns="0" tIns="0" rIns="0" bIns="0" anchor="ctr"/>
               <a:lstStyle/>
               <a:p>
                 <a:pPr marL="0" indent="0" algn="l">
                   <a:buNone/>
+                  <a:defRPr/>
                 </a:pPr>
                 <a:r>
-                  <a:rPr lang="ko-KR" altLang="en-US" sz="1400" b="1" kern="0" spc="165" dirty="0">
+                  <a:rPr lang="ko-KR" altLang="en-US" sz="1400" b="1" kern="0" spc="165">
                     <a:solidFill>
                       <a:srgbClr val="164194"/>
                     </a:solidFill>
-                    <a:latin typeface="맑은 고딕" panose="020B0503020000020004" pitchFamily="50" charset="-127"/>
-                    <a:ea typeface="맑은 고딕" panose="020B0503020000020004" pitchFamily="50" charset="-127"/>
-                    <a:cs typeface="Pretendard Variable" pitchFamily="34" charset="-120"/>
+                    <a:latin typeface="맑은 고딕"/>
+                    <a:ea typeface="맑은 고딕"/>
+                    <a:cs typeface="Pretendard Variable"/>
                   </a:rPr>
                   <a:t>본부 </a:t>
                 </a:r>
                 <a:r>
-                  <a:rPr lang="en-US" altLang="ko-KR" sz="1400" b="1" kern="0" spc="165" dirty="0">
+                  <a:rPr lang="en-US" altLang="ko-KR" sz="1400" b="1" kern="0" spc="165">
                     <a:solidFill>
                       <a:srgbClr val="164194"/>
                     </a:solidFill>
-                    <a:latin typeface="맑은 고딕" panose="020B0503020000020004" pitchFamily="50" charset="-127"/>
-                    <a:ea typeface="맑은 고딕" panose="020B0503020000020004" pitchFamily="50" charset="-127"/>
-                    <a:cs typeface="Pretendard Variable" pitchFamily="34" charset="-120"/>
+                    <a:latin typeface="맑은 고딕"/>
+                    <a:ea typeface="맑은 고딕"/>
+                    <a:cs typeface="Pretendard Variable"/>
                   </a:rPr>
                   <a:t>: </a:t>
                 </a:r>
-                <a:endParaRPr lang="en-US" sz="1400" dirty="0">
-                  <a:latin typeface="맑은 고딕" panose="020B0503020000020004" pitchFamily="50" charset="-127"/>
-                  <a:ea typeface="맑은 고딕" panose="020B0503020000020004" pitchFamily="50" charset="-127"/>
+                <a:endParaRPr lang="en-US" sz="1400">
+                  <a:latin typeface="맑은 고딕"/>
+                  <a:ea typeface="맑은 고딕"/>
                 </a:endParaRPr>
               </a:p>
             </p:txBody>
@@ -1037,9 +881,12 @@
               <a:bodyPr/>
               <a:lstStyle/>
               <a:p>
+                <a:pPr lvl="0">
+                  <a:defRPr/>
+                </a:pPr>
                 <a:endParaRPr lang="ko-KR" altLang="en-US" sz="1400">
-                  <a:latin typeface="맑은 고딕" panose="020B0503020000020004" pitchFamily="50" charset="-127"/>
-                  <a:ea typeface="맑은 고딕" panose="020B0503020000020004" pitchFamily="50" charset="-127"/>
+                  <a:latin typeface="맑은 고딕"/>
+                  <a:ea typeface="맑은 고딕"/>
                 </a:endParaRPr>
               </a:p>
             </p:txBody>
@@ -1047,13 +894,7 @@
         </p:grpSp>
         <p:grpSp>
           <p:nvGrpSpPr>
-            <p:cNvPr id="96" name="그룹 95">
-              <a:extLst>
-                <a:ext uri="{FF2B5EF4-FFF2-40B4-BE49-F238E27FC236}">
-                  <a16:creationId xmlns:a16="http://schemas.microsoft.com/office/drawing/2014/main" id="{782CB695-2560-9EA6-FA2B-32CFBD19FACF}"/>
-                </a:ext>
-              </a:extLst>
-            </p:cNvPr>
+            <p:cNvPr id="96" name="그룹 95"/>
             <p:cNvGrpSpPr/>
             <p:nvPr/>
           </p:nvGrpSpPr>
@@ -1067,13 +908,7 @@
           </p:grpSpPr>
           <p:sp>
             <p:nvSpPr>
-              <p:cNvPr id="90" name="Text 8">
-                <a:extLst>
-                  <a:ext uri="{FF2B5EF4-FFF2-40B4-BE49-F238E27FC236}">
-                    <a16:creationId xmlns:a16="http://schemas.microsoft.com/office/drawing/2014/main" id="{EDC2A329-0A48-BC1A-8A48-81C221615057}"/>
-                  </a:ext>
-                </a:extLst>
-              </p:cNvPr>
+              <p:cNvPr id="90" name="Text 8"/>
               <p:cNvSpPr txBox="1"/>
               <p:nvPr/>
             </p:nvSpPr>
@@ -1089,50 +924,45 @@
               <a:ln/>
             </p:spPr>
             <p:txBody>
-              <a:bodyPr wrap="none" lIns="0" tIns="0" rIns="0" bIns="0" rtlCol="0" anchor="ctr"/>
+              <a:bodyPr wrap="none" lIns="0" tIns="0" rIns="0" bIns="0" anchor="ctr"/>
               <a:lstStyle/>
               <a:p>
                 <a:pPr marL="0" indent="0" algn="l">
                   <a:buNone/>
+                  <a:defRPr/>
                 </a:pPr>
                 <a:r>
-                  <a:rPr lang="ko-KR" altLang="en-US" sz="1400" b="1" kern="0" spc="165" dirty="0">
+                  <a:rPr lang="ko-KR" altLang="en-US" sz="1400" b="1" kern="0" spc="165">
                     <a:solidFill>
                       <a:srgbClr val="164194"/>
                     </a:solidFill>
-                    <a:latin typeface="맑은 고딕" panose="020B0503020000020004" pitchFamily="50" charset="-127"/>
-                    <a:ea typeface="맑은 고딕" panose="020B0503020000020004" pitchFamily="50" charset="-127"/>
-                    <a:cs typeface="Pretendard Variable" pitchFamily="34" charset="-120"/>
+                    <a:latin typeface="맑은 고딕"/>
+                    <a:ea typeface="맑은 고딕"/>
+                    <a:cs typeface="Pretendard Variable"/>
                   </a:rPr>
                   <a:t>팀 </a:t>
                 </a:r>
                 <a:r>
-                  <a:rPr lang="en-US" altLang="ko-KR" sz="1400" b="1" kern="0" spc="165" dirty="0">
+                  <a:rPr lang="en-US" altLang="ko-KR" sz="1400" b="1" kern="0" spc="165">
                     <a:solidFill>
                       <a:srgbClr val="164194"/>
                     </a:solidFill>
-                    <a:latin typeface="맑은 고딕" panose="020B0503020000020004" pitchFamily="50" charset="-127"/>
-                    <a:ea typeface="맑은 고딕" panose="020B0503020000020004" pitchFamily="50" charset="-127"/>
-                    <a:cs typeface="Pretendard Variable" pitchFamily="34" charset="-120"/>
+                    <a:latin typeface="맑은 고딕"/>
+                    <a:ea typeface="맑은 고딕"/>
+                    <a:cs typeface="Pretendard Variable"/>
                   </a:rPr>
                   <a:t>: </a:t>
                 </a:r>
-                <a:endParaRPr lang="en-US" sz="1400" dirty="0">
-                  <a:latin typeface="맑은 고딕" panose="020B0503020000020004" pitchFamily="50" charset="-127"/>
-                  <a:ea typeface="맑은 고딕" panose="020B0503020000020004" pitchFamily="50" charset="-127"/>
+                <a:endParaRPr lang="en-US" sz="1400">
+                  <a:latin typeface="맑은 고딕"/>
+                  <a:ea typeface="맑은 고딕"/>
                 </a:endParaRPr>
               </a:p>
             </p:txBody>
           </p:sp>
           <p:sp>
             <p:nvSpPr>
-              <p:cNvPr id="91" name="Shape 9">
-                <a:extLst>
-                  <a:ext uri="{FF2B5EF4-FFF2-40B4-BE49-F238E27FC236}">
-                    <a16:creationId xmlns:a16="http://schemas.microsoft.com/office/drawing/2014/main" id="{BB958766-A899-A1F0-BE57-400E8CFFB773}"/>
-                  </a:ext>
-                </a:extLst>
-              </p:cNvPr>
+              <p:cNvPr id="91" name="Shape 9"/>
               <p:cNvSpPr/>
               <p:nvPr/>
             </p:nvSpPr>
@@ -1160,9 +990,12 @@
               <a:bodyPr/>
               <a:lstStyle/>
               <a:p>
+                <a:pPr lvl="0">
+                  <a:defRPr/>
+                </a:pPr>
                 <a:endParaRPr lang="ko-KR" altLang="en-US" sz="1400">
-                  <a:latin typeface="맑은 고딕" panose="020B0503020000020004" pitchFamily="50" charset="-127"/>
-                  <a:ea typeface="맑은 고딕" panose="020B0503020000020004" pitchFamily="50" charset="-127"/>
+                  <a:latin typeface="맑은 고딕"/>
+                  <a:ea typeface="맑은 고딕"/>
                 </a:endParaRPr>
               </a:p>
             </p:txBody>
@@ -1170,13 +1003,7 @@
         </p:grpSp>
         <p:grpSp>
           <p:nvGrpSpPr>
-            <p:cNvPr id="95" name="그룹 94">
-              <a:extLst>
-                <a:ext uri="{FF2B5EF4-FFF2-40B4-BE49-F238E27FC236}">
-                  <a16:creationId xmlns:a16="http://schemas.microsoft.com/office/drawing/2014/main" id="{3B69F5DA-E43B-F3C2-C2C8-56A38B06A90C}"/>
-                </a:ext>
-              </a:extLst>
-            </p:cNvPr>
+            <p:cNvPr id="95" name="그룹 94"/>
             <p:cNvGrpSpPr/>
             <p:nvPr/>
           </p:nvGrpSpPr>
@@ -1190,13 +1017,7 @@
           </p:grpSpPr>
           <p:sp>
             <p:nvSpPr>
-              <p:cNvPr id="92" name="Text 8">
-                <a:extLst>
-                  <a:ext uri="{FF2B5EF4-FFF2-40B4-BE49-F238E27FC236}">
-                    <a16:creationId xmlns:a16="http://schemas.microsoft.com/office/drawing/2014/main" id="{DE21AEE3-8D95-5A36-8AAD-C769A26AFEBF}"/>
-                  </a:ext>
-                </a:extLst>
-              </p:cNvPr>
+              <p:cNvPr id="92" name="Text 8"/>
               <p:cNvSpPr txBox="1"/>
               <p:nvPr/>
             </p:nvSpPr>
@@ -1212,50 +1033,45 @@
               <a:ln/>
             </p:spPr>
             <p:txBody>
-              <a:bodyPr wrap="none" lIns="0" tIns="0" rIns="0" bIns="0" rtlCol="0" anchor="ctr"/>
+              <a:bodyPr wrap="none" lIns="0" tIns="0" rIns="0" bIns="0" anchor="ctr"/>
               <a:lstStyle/>
               <a:p>
                 <a:pPr marL="0" indent="0" algn="l">
                   <a:buNone/>
+                  <a:defRPr/>
                 </a:pPr>
                 <a:r>
-                  <a:rPr lang="ko-KR" altLang="en-US" sz="1400" b="1" kern="0" spc="165" dirty="0">
+                  <a:rPr lang="ko-KR" altLang="en-US" sz="1400" b="1" kern="0" spc="165">
                     <a:solidFill>
                       <a:srgbClr val="164194"/>
                     </a:solidFill>
-                    <a:latin typeface="맑은 고딕" panose="020B0503020000020004" pitchFamily="50" charset="-127"/>
-                    <a:ea typeface="맑은 고딕" panose="020B0503020000020004" pitchFamily="50" charset="-127"/>
-                    <a:cs typeface="Pretendard Variable" pitchFamily="34" charset="-120"/>
+                    <a:latin typeface="맑은 고딕"/>
+                    <a:ea typeface="맑은 고딕"/>
+                    <a:cs typeface="Pretendard Variable"/>
                   </a:rPr>
                   <a:t>이름 </a:t>
                 </a:r>
                 <a:r>
-                  <a:rPr lang="en-US" altLang="ko-KR" sz="1400" b="1" kern="0" spc="165" dirty="0">
+                  <a:rPr lang="en-US" altLang="ko-KR" sz="1400" b="1" kern="0" spc="165">
                     <a:solidFill>
                       <a:srgbClr val="164194"/>
                     </a:solidFill>
-                    <a:latin typeface="맑은 고딕" panose="020B0503020000020004" pitchFamily="50" charset="-127"/>
-                    <a:ea typeface="맑은 고딕" panose="020B0503020000020004" pitchFamily="50" charset="-127"/>
-                    <a:cs typeface="Pretendard Variable" pitchFamily="34" charset="-120"/>
+                    <a:latin typeface="맑은 고딕"/>
+                    <a:ea typeface="맑은 고딕"/>
+                    <a:cs typeface="Pretendard Variable"/>
                   </a:rPr>
                   <a:t>: </a:t>
                 </a:r>
-                <a:endParaRPr lang="en-US" sz="1400" dirty="0">
-                  <a:latin typeface="맑은 고딕" panose="020B0503020000020004" pitchFamily="50" charset="-127"/>
-                  <a:ea typeface="맑은 고딕" panose="020B0503020000020004" pitchFamily="50" charset="-127"/>
+                <a:endParaRPr lang="en-US" sz="1400">
+                  <a:latin typeface="맑은 고딕"/>
+                  <a:ea typeface="맑은 고딕"/>
                 </a:endParaRPr>
               </a:p>
             </p:txBody>
           </p:sp>
           <p:sp>
             <p:nvSpPr>
-              <p:cNvPr id="93" name="Shape 9">
-                <a:extLst>
-                  <a:ext uri="{FF2B5EF4-FFF2-40B4-BE49-F238E27FC236}">
-                    <a16:creationId xmlns:a16="http://schemas.microsoft.com/office/drawing/2014/main" id="{9721148A-0B29-DBAB-177B-8842F2F55E47}"/>
-                  </a:ext>
-                </a:extLst>
-              </p:cNvPr>
+              <p:cNvPr id="93" name="Shape 9"/>
               <p:cNvSpPr/>
               <p:nvPr/>
             </p:nvSpPr>
@@ -1283,9 +1099,12 @@
               <a:bodyPr/>
               <a:lstStyle/>
               <a:p>
+                <a:pPr lvl="0">
+                  <a:defRPr/>
+                </a:pPr>
                 <a:endParaRPr lang="ko-KR" altLang="en-US" sz="1400">
-                  <a:latin typeface="맑은 고딕" panose="020B0503020000020004" pitchFamily="50" charset="-127"/>
-                  <a:ea typeface="맑은 고딕" panose="020B0503020000020004" pitchFamily="50" charset="-127"/>
+                  <a:latin typeface="맑은 고딕"/>
+                  <a:ea typeface="맑은 고딕"/>
                 </a:endParaRPr>
               </a:p>
             </p:txBody>
@@ -1294,33 +1113,21 @@
       </p:grpSp>
       <p:grpSp>
         <p:nvGrpSpPr>
-          <p:cNvPr id="135" name="그룹 134">
-            <a:extLst>
-              <a:ext uri="{FF2B5EF4-FFF2-40B4-BE49-F238E27FC236}">
-                <a16:creationId xmlns:a16="http://schemas.microsoft.com/office/drawing/2014/main" id="{0E53EFD5-A052-95CB-DFCC-14002D20D15B}"/>
-              </a:ext>
-            </a:extLst>
-          </p:cNvPr>
+          <p:cNvPr id="135" name="그룹 134"/>
           <p:cNvGrpSpPr/>
           <p:nvPr/>
         </p:nvGrpSpPr>
         <p:grpSpPr>
           <a:xfrm>
             <a:off x="800100" y="2734417"/>
-            <a:ext cx="10782604" cy="1116635"/>
+            <a:ext cx="10782603" cy="1116635"/>
             <a:chOff x="800100" y="2938424"/>
-            <a:chExt cx="10782604" cy="1340967"/>
+            <a:chExt cx="10782603" cy="1340967"/>
           </a:xfrm>
         </p:grpSpPr>
         <p:sp>
           <p:nvSpPr>
-            <p:cNvPr id="116" name="Text 14">
-              <a:extLst>
-                <a:ext uri="{FF2B5EF4-FFF2-40B4-BE49-F238E27FC236}">
-                  <a16:creationId xmlns:a16="http://schemas.microsoft.com/office/drawing/2014/main" id="{AC667DBA-019A-D371-1B40-F14F6E265E0F}"/>
-                </a:ext>
-              </a:extLst>
-            </p:cNvPr>
+            <p:cNvPr id="116" name="Text 14"/>
             <p:cNvSpPr txBox="1"/>
             <p:nvPr/>
           </p:nvSpPr>
@@ -1336,50 +1143,45 @@
             <a:ln/>
           </p:spPr>
           <p:txBody>
-            <a:bodyPr wrap="none" lIns="0" tIns="0" rIns="0" bIns="0" rtlCol="0" anchor="ctr"/>
+            <a:bodyPr wrap="none" lIns="0" tIns="0" rIns="0" bIns="0" anchor="ctr"/>
             <a:lstStyle/>
             <a:p>
               <a:pPr marL="0" indent="0" algn="l">
                 <a:buNone/>
+                <a:defRPr/>
               </a:pPr>
               <a:r>
-                <a:rPr lang="en-US" sz="2400" b="1" kern="0" spc="-84" dirty="0">
+                <a:rPr lang="en-US" sz="2400" b="1" kern="0" spc="-84">
                   <a:solidFill>
                     <a:srgbClr val="164194"/>
                   </a:solidFill>
-                  <a:latin typeface="맑은 고딕" panose="020B0503020000020004" pitchFamily="50" charset="-127"/>
-                  <a:ea typeface="맑은 고딕" panose="020B0503020000020004" pitchFamily="50" charset="-127"/>
-                  <a:cs typeface="Pretendard Variable" pitchFamily="34" charset="-120"/>
+                  <a:latin typeface="맑은 고딕"/>
+                  <a:ea typeface="맑은 고딕"/>
+                  <a:cs typeface="Pretendard Variable"/>
                 </a:rPr>
                 <a:t>0</a:t>
               </a:r>
               <a:r>
-                <a:rPr lang="en-US" altLang="ko-KR" sz="2400" b="1" kern="0" spc="-84" dirty="0">
+                <a:rPr lang="en-US" altLang="ko-KR" sz="2400" b="1" kern="0" spc="-84">
                   <a:solidFill>
                     <a:srgbClr val="164194"/>
                   </a:solidFill>
-                  <a:latin typeface="맑은 고딕" panose="020B0503020000020004" pitchFamily="50" charset="-127"/>
-                  <a:ea typeface="맑은 고딕" panose="020B0503020000020004" pitchFamily="50" charset="-127"/>
-                  <a:cs typeface="Pretendard Variable" pitchFamily="34" charset="-120"/>
+                  <a:latin typeface="맑은 고딕"/>
+                  <a:ea typeface="맑은 고딕"/>
+                  <a:cs typeface="Pretendard Variable"/>
                 </a:rPr>
                 <a:t>2</a:t>
               </a:r>
-              <a:endParaRPr lang="en-US" sz="2400" dirty="0">
-                <a:latin typeface="맑은 고딕" panose="020B0503020000020004" pitchFamily="50" charset="-127"/>
-                <a:ea typeface="맑은 고딕" panose="020B0503020000020004" pitchFamily="50" charset="-127"/>
+              <a:endParaRPr lang="en-US" sz="2400">
+                <a:latin typeface="맑은 고딕"/>
+                <a:ea typeface="맑은 고딕"/>
               </a:endParaRPr>
             </a:p>
           </p:txBody>
         </p:sp>
         <p:sp>
           <p:nvSpPr>
-            <p:cNvPr id="117" name="Text 16">
-              <a:extLst>
-                <a:ext uri="{FF2B5EF4-FFF2-40B4-BE49-F238E27FC236}">
-                  <a16:creationId xmlns:a16="http://schemas.microsoft.com/office/drawing/2014/main" id="{4ACF29FF-8DF4-3F16-EB2F-FE0DEC0EAF20}"/>
-                </a:ext>
-              </a:extLst>
-            </p:cNvPr>
+            <p:cNvPr id="117" name="Text 16"/>
             <p:cNvSpPr txBox="1"/>
             <p:nvPr/>
           </p:nvSpPr>
@@ -1395,102 +1197,43 @@
             <a:ln/>
           </p:spPr>
           <p:txBody>
-            <a:bodyPr wrap="none" lIns="0" tIns="0" rIns="0" bIns="0" rtlCol="0" anchor="ctr"/>
+            <a:bodyPr wrap="none" lIns="0" tIns="0" rIns="0" bIns="0" anchor="ctr"/>
             <a:lstStyle/>
             <a:p>
               <a:pPr marL="0" indent="0" algn="l">
                 <a:buNone/>
+                <a:defRPr/>
               </a:pPr>
               <a:r>
-                <a:rPr kumimoji="0" lang="en-US" altLang="ko-KR" sz="1400" b="1" i="0" u="none" strike="noStrike" kern="1200" cap="none" spc="0" normalizeH="0" baseline="0" noProof="0" dirty="0">
-                  <a:ln>
-                    <a:noFill/>
-                  </a:ln>
+                <a:rPr kumimoji="0" lang="en-US" altLang="ko-KR" sz="1400" b="1" i="0" u="none" strike="noStrike" kern="1200" cap="none" spc="0" normalizeH="0" baseline="0">
                   <a:solidFill>
                     <a:srgbClr val="1A1A1A"/>
                   </a:solidFill>
                   <a:effectLst/>
                   <a:uLnTx/>
                   <a:uFillTx/>
-                  <a:latin typeface="맑은 고딕" panose="020B0503020000020004" pitchFamily="50" charset="-127"/>
-                  <a:ea typeface="맑은 고딕" panose="020B0503020000020004" pitchFamily="50" charset="-127"/>
-                  <a:cs typeface="Pretendard Variable" pitchFamily="34" charset="-120"/>
-                </a:rPr>
-                <a:t>AI </a:t>
-              </a:r>
-              <a:r>
-                <a:rPr kumimoji="0" lang="en-US" altLang="ko-KR" sz="1400" b="1" i="0" u="none" strike="noStrike" kern="1200" cap="none" spc="0" normalizeH="0" baseline="0" noProof="0" dirty="0" err="1">
-                  <a:ln>
-                    <a:noFill/>
-                  </a:ln>
-                  <a:solidFill>
-                    <a:srgbClr val="1A1A1A"/>
-                  </a:solidFill>
-                  <a:effectLst/>
-                  <a:uLnTx/>
-                  <a:uFillTx/>
-                  <a:latin typeface="맑은 고딕" panose="020B0503020000020004" pitchFamily="50" charset="-127"/>
-                  <a:ea typeface="맑은 고딕" panose="020B0503020000020004" pitchFamily="50" charset="-127"/>
-                  <a:cs typeface="Pretendard Variable" pitchFamily="34" charset="-120"/>
-                </a:rPr>
-                <a:t>활용</a:t>
-              </a:r>
-              <a:r>
-                <a:rPr kumimoji="0" lang="en-US" altLang="ko-KR" sz="1400" b="1" i="0" u="none" strike="noStrike" kern="1200" cap="none" spc="0" normalizeH="0" baseline="0" noProof="0" dirty="0">
-                  <a:ln>
-                    <a:noFill/>
-                  </a:ln>
-                  <a:solidFill>
-                    <a:srgbClr val="1A1A1A"/>
-                  </a:solidFill>
-                  <a:effectLst/>
-                  <a:uLnTx/>
-                  <a:uFillTx/>
-                  <a:latin typeface="맑은 고딕" panose="020B0503020000020004" pitchFamily="50" charset="-127"/>
-                  <a:ea typeface="맑은 고딕" panose="020B0503020000020004" pitchFamily="50" charset="-127"/>
-                  <a:cs typeface="Pretendard Variable" pitchFamily="34" charset="-120"/>
-                </a:rPr>
-                <a:t> </a:t>
-              </a:r>
-              <a:r>
-                <a:rPr kumimoji="0" lang="en-US" altLang="ko-KR" sz="1400" b="1" i="0" u="none" strike="noStrike" kern="1200" cap="none" spc="0" normalizeH="0" baseline="0" noProof="0" dirty="0" err="1">
-                  <a:ln>
-                    <a:noFill/>
-                  </a:ln>
-                  <a:solidFill>
-                    <a:srgbClr val="1A1A1A"/>
-                  </a:solidFill>
-                  <a:effectLst/>
-                  <a:uLnTx/>
-                  <a:uFillTx/>
-                  <a:latin typeface="맑은 고딕" panose="020B0503020000020004" pitchFamily="50" charset="-127"/>
-                  <a:ea typeface="맑은 고딕" panose="020B0503020000020004" pitchFamily="50" charset="-127"/>
-                  <a:cs typeface="Pretendard Variable" pitchFamily="34" charset="-120"/>
-                </a:rPr>
-                <a:t>방식</a:t>
-              </a:r>
-              <a:endParaRPr lang="en-US" sz="1400" dirty="0">
-                <a:latin typeface="맑은 고딕" panose="020B0503020000020004" pitchFamily="50" charset="-127"/>
-                <a:ea typeface="맑은 고딕" panose="020B0503020000020004" pitchFamily="50" charset="-127"/>
+                  <a:latin typeface="맑은 고딕"/>
+                  <a:ea typeface="맑은 고딕"/>
+                  <a:cs typeface="Pretendard Variable"/>
+                </a:rPr>
+                <a:t>AI 활용 방식</a:t>
+              </a:r>
+              <a:endParaRPr lang="en-US" sz="1400">
+                <a:latin typeface="맑은 고딕"/>
+                <a:ea typeface="맑은 고딕"/>
               </a:endParaRPr>
             </a:p>
           </p:txBody>
         </p:sp>
         <p:grpSp>
           <p:nvGrpSpPr>
-            <p:cNvPr id="119" name="그룹 118">
-              <a:extLst>
-                <a:ext uri="{FF2B5EF4-FFF2-40B4-BE49-F238E27FC236}">
-                  <a16:creationId xmlns:a16="http://schemas.microsoft.com/office/drawing/2014/main" id="{ED65CC9F-0BF0-52BB-00B5-5E86A0145C6F}"/>
-                </a:ext>
-              </a:extLst>
-            </p:cNvPr>
+            <p:cNvPr id="119" name="그룹 118"/>
             <p:cNvGrpSpPr/>
             <p:nvPr/>
           </p:nvGrpSpPr>
           <p:grpSpPr>
             <a:xfrm>
-              <a:off x="8134502" y="3240175"/>
+              <a:off x="8134501" y="3240175"/>
               <a:ext cx="3448202" cy="1039216"/>
               <a:chOff x="8134502" y="1383487"/>
               <a:chExt cx="3448202" cy="647395"/>
@@ -1498,22 +1241,18 @@
           </p:grpSpPr>
           <p:pic>
             <p:nvPicPr>
-              <p:cNvPr id="120" name="Image 9" descr="gen-dedup-a4f779325862798106cab1a6fb4b41f4.png">
-                <a:extLst>
-                  <a:ext uri="{FF2B5EF4-FFF2-40B4-BE49-F238E27FC236}">
-                    <a16:creationId xmlns:a16="http://schemas.microsoft.com/office/drawing/2014/main" id="{3E6F1A44-D193-5C6C-2B40-0B09E3133069}"/>
-                  </a:ext>
-                </a:extLst>
-              </p:cNvPr>
+              <p:cNvPr id="120" name="Image 9" descr="gen-dedup-a4f779325862798106cab1a6fb4b41f4.png"/>
               <p:cNvPicPr>
                 <a:picLocks noChangeAspect="1"/>
               </p:cNvPicPr>
               <p:nvPr/>
             </p:nvPicPr>
-            <p:blipFill>
+            <p:blipFill rotWithShape="1">
               <a:blip r:embed="rId4"/>
-              <a:srcRect l="-26" r="-26"/>
-              <a:stretch/>
+              <a:srcRect l="-30" r="-30"/>
+              <a:stretch>
+                <a:fillRect/>
+              </a:stretch>
             </p:blipFill>
             <p:spPr>
               <a:xfrm>
@@ -1527,13 +1266,7 @@
           </p:pic>
           <p:sp>
             <p:nvSpPr>
-              <p:cNvPr id="121" name="Text 19">
-                <a:extLst>
-                  <a:ext uri="{FF2B5EF4-FFF2-40B4-BE49-F238E27FC236}">
-                    <a16:creationId xmlns:a16="http://schemas.microsoft.com/office/drawing/2014/main" id="{36A6B5D9-D23C-FFD3-5537-0FC2F49E51AC}"/>
-                  </a:ext>
-                </a:extLst>
-              </p:cNvPr>
+              <p:cNvPr id="121" name="Text 19"/>
               <p:cNvSpPr txBox="1"/>
               <p:nvPr/>
             </p:nvSpPr>
@@ -1549,39 +1282,34 @@
               <a:ln/>
             </p:spPr>
             <p:txBody>
-              <a:bodyPr wrap="none" lIns="0" tIns="0" rIns="0" bIns="0" rtlCol="0" anchor="ctr"/>
+              <a:bodyPr wrap="none" lIns="0" tIns="0" rIns="0" bIns="0" anchor="ctr"/>
               <a:lstStyle/>
               <a:p>
                 <a:pPr marL="0" indent="0" algn="l">
                   <a:buNone/>
+                  <a:defRPr/>
                 </a:pPr>
                 <a:r>
-                  <a:rPr lang="en-US" sz="1400" b="1" kern="0" spc="142" dirty="0">
+                  <a:rPr lang="en-US" sz="1400" b="1" kern="0" spc="142">
                     <a:solidFill>
                       <a:srgbClr val="70AD47"/>
                     </a:solidFill>
-                    <a:latin typeface="맑은 고딕" panose="020B0503020000020004" pitchFamily="50" charset="-127"/>
-                    <a:ea typeface="맑은 고딕" panose="020B0503020000020004" pitchFamily="50" charset="-127"/>
-                    <a:cs typeface="Pretendard Variable" pitchFamily="34" charset="-120"/>
+                    <a:latin typeface="맑은 고딕"/>
+                    <a:ea typeface="맑은 고딕"/>
+                    <a:cs typeface="Pretendard Variable"/>
                   </a:rPr>
                   <a:t>왜 작성하는가?</a:t>
                 </a:r>
-                <a:endParaRPr lang="en-US" sz="1400" dirty="0">
-                  <a:latin typeface="맑은 고딕" panose="020B0503020000020004" pitchFamily="50" charset="-127"/>
-                  <a:ea typeface="맑은 고딕" panose="020B0503020000020004" pitchFamily="50" charset="-127"/>
+                <a:endParaRPr lang="en-US" sz="1400">
+                  <a:latin typeface="맑은 고딕"/>
+                  <a:ea typeface="맑은 고딕"/>
                 </a:endParaRPr>
               </a:p>
             </p:txBody>
           </p:sp>
           <p:sp>
             <p:nvSpPr>
-              <p:cNvPr id="122" name="Text 20">
-                <a:extLst>
-                  <a:ext uri="{FF2B5EF4-FFF2-40B4-BE49-F238E27FC236}">
-                    <a16:creationId xmlns:a16="http://schemas.microsoft.com/office/drawing/2014/main" id="{4F0AAA9C-8791-A60D-D529-2A9DB4AD1359}"/>
-                  </a:ext>
-                </a:extLst>
-              </p:cNvPr>
+              <p:cNvPr id="122" name="Text 20"/>
               <p:cNvSpPr txBox="1"/>
               <p:nvPr/>
             </p:nvSpPr>
@@ -1597,303 +1325,51 @@
               <a:ln/>
             </p:spPr>
             <p:txBody>
-              <a:bodyPr wrap="square" lIns="0" tIns="0" rIns="0" bIns="0" rtlCol="0" anchor="ctr"/>
+              <a:bodyPr wrap="square" lIns="0" tIns="0" rIns="0" bIns="0" anchor="ctr"/>
               <a:lstStyle/>
               <a:p>
                 <a:pPr>
                   <a:lnSpc>
                     <a:spcPts val="1238"/>
                   </a:lnSpc>
+                  <a:defRPr/>
                 </a:pPr>
                 <a:r>
-                  <a:rPr lang="en-US" altLang="ko-KR" sz="1200" dirty="0" err="1">
+                  <a:rPr lang="en-US" altLang="ko-KR" sz="1200">
                     <a:solidFill>
                       <a:srgbClr val="1A1A1A"/>
                     </a:solidFill>
-                    <a:latin typeface="맑은 고딕" panose="020B0503020000020004" pitchFamily="50" charset="-127"/>
-                    <a:ea typeface="맑은 고딕" panose="020B0503020000020004" pitchFamily="50" charset="-127"/>
-                    <a:cs typeface="Pretendard Variable" pitchFamily="34" charset="-120"/>
+                    <a:latin typeface="맑은 고딕"/>
+                    <a:ea typeface="맑은 고딕"/>
+                    <a:cs typeface="Pretendard Variable"/>
                   </a:rPr>
-                  <a:t>기능을</a:t>
+                  <a:t>기능을 고르는 순간 </a:t>
                 </a:r>
                 <a:r>
-                  <a:rPr lang="en-US" altLang="ko-KR" sz="1200" dirty="0">
+                  <a:rPr lang="en-US" altLang="ko-KR" sz="1200" b="1">
+                    <a:solidFill>
+                      <a:srgbClr val="70AD47"/>
+                    </a:solidFill>
+                    <a:latin typeface="맑은 고딕"/>
+                    <a:ea typeface="맑은 고딕"/>
+                    <a:cs typeface="Pretendard Variable"/>
+                  </a:rPr>
+                  <a:t>‘AI 적용 가능성’</a:t>
+                </a:r>
+                <a:r>
+                  <a:rPr lang="en-US" altLang="ko-KR" sz="1200">
                     <a:solidFill>
                       <a:srgbClr val="1A1A1A"/>
                     </a:solidFill>
-                    <a:latin typeface="맑은 고딕" panose="020B0503020000020004" pitchFamily="50" charset="-127"/>
-                    <a:ea typeface="맑은 고딕" panose="020B0503020000020004" pitchFamily="50" charset="-127"/>
-                    <a:cs typeface="Pretendard Variable" pitchFamily="34" charset="-120"/>
+                    <a:latin typeface="맑은 고딕"/>
+                    <a:ea typeface="맑은 고딕"/>
+                    <a:cs typeface="Pretendard Variable"/>
                   </a:rPr>
-                  <a:t> </a:t>
+                  <a:t>을 스스로 판단하게 됩니다. 이 선택이 곧 AI 활용 방식 설계입니다.</a:t>
                 </a:r>
-                <a:r>
-                  <a:rPr lang="en-US" altLang="ko-KR" sz="1200" dirty="0" err="1">
-                    <a:solidFill>
-                      <a:srgbClr val="1A1A1A"/>
-                    </a:solidFill>
-                    <a:latin typeface="맑은 고딕" panose="020B0503020000020004" pitchFamily="50" charset="-127"/>
-                    <a:ea typeface="맑은 고딕" panose="020B0503020000020004" pitchFamily="50" charset="-127"/>
-                    <a:cs typeface="Pretendard Variable" pitchFamily="34" charset="-120"/>
-                  </a:rPr>
-                  <a:t>고르는</a:t>
-                </a:r>
-                <a:r>
-                  <a:rPr lang="en-US" altLang="ko-KR" sz="1200" dirty="0">
-                    <a:solidFill>
-                      <a:srgbClr val="1A1A1A"/>
-                    </a:solidFill>
-                    <a:latin typeface="맑은 고딕" panose="020B0503020000020004" pitchFamily="50" charset="-127"/>
-                    <a:ea typeface="맑은 고딕" panose="020B0503020000020004" pitchFamily="50" charset="-127"/>
-                    <a:cs typeface="Pretendard Variable" pitchFamily="34" charset="-120"/>
-                  </a:rPr>
-                  <a:t> </a:t>
-                </a:r>
-                <a:r>
-                  <a:rPr lang="en-US" altLang="ko-KR" sz="1200" dirty="0" err="1">
-                    <a:solidFill>
-                      <a:srgbClr val="1A1A1A"/>
-                    </a:solidFill>
-                    <a:latin typeface="맑은 고딕" panose="020B0503020000020004" pitchFamily="50" charset="-127"/>
-                    <a:ea typeface="맑은 고딕" panose="020B0503020000020004" pitchFamily="50" charset="-127"/>
-                    <a:cs typeface="Pretendard Variable" pitchFamily="34" charset="-120"/>
-                  </a:rPr>
-                  <a:t>순간</a:t>
-                </a:r>
-                <a:r>
-                  <a:rPr lang="en-US" altLang="ko-KR" sz="1200" dirty="0">
-                    <a:solidFill>
-                      <a:srgbClr val="1A1A1A"/>
-                    </a:solidFill>
-                    <a:latin typeface="맑은 고딕" panose="020B0503020000020004" pitchFamily="50" charset="-127"/>
-                    <a:ea typeface="맑은 고딕" panose="020B0503020000020004" pitchFamily="50" charset="-127"/>
-                    <a:cs typeface="Pretendard Variable" pitchFamily="34" charset="-120"/>
-                  </a:rPr>
-                  <a:t> </a:t>
-                </a:r>
-                <a:r>
-                  <a:rPr lang="en-US" altLang="ko-KR" sz="1200" b="1" dirty="0">
-                    <a:solidFill>
-                      <a:srgbClr val="70AD47"/>
-                    </a:solidFill>
-                    <a:latin typeface="맑은 고딕" panose="020B0503020000020004" pitchFamily="50" charset="-127"/>
-                    <a:ea typeface="맑은 고딕" panose="020B0503020000020004" pitchFamily="50" charset="-127"/>
-                    <a:cs typeface="Pretendard Variable" pitchFamily="34" charset="-120"/>
-                  </a:rPr>
-                  <a:t>‘AI </a:t>
-                </a:r>
-                <a:r>
-                  <a:rPr lang="en-US" altLang="ko-KR" sz="1200" b="1" dirty="0" err="1">
-                    <a:solidFill>
-                      <a:srgbClr val="70AD47"/>
-                    </a:solidFill>
-                    <a:latin typeface="맑은 고딕" panose="020B0503020000020004" pitchFamily="50" charset="-127"/>
-                    <a:ea typeface="맑은 고딕" panose="020B0503020000020004" pitchFamily="50" charset="-127"/>
-                    <a:cs typeface="Pretendard Variable" pitchFamily="34" charset="-120"/>
-                  </a:rPr>
-                  <a:t>적용</a:t>
-                </a:r>
-                <a:r>
-                  <a:rPr lang="en-US" altLang="ko-KR" sz="1200" b="1" dirty="0">
-                    <a:solidFill>
-                      <a:srgbClr val="70AD47"/>
-                    </a:solidFill>
-                    <a:latin typeface="맑은 고딕" panose="020B0503020000020004" pitchFamily="50" charset="-127"/>
-                    <a:ea typeface="맑은 고딕" panose="020B0503020000020004" pitchFamily="50" charset="-127"/>
-                    <a:cs typeface="Pretendard Variable" pitchFamily="34" charset="-120"/>
-                  </a:rPr>
-                  <a:t> </a:t>
-                </a:r>
-                <a:r>
-                  <a:rPr lang="en-US" altLang="ko-KR" sz="1200" b="1" dirty="0" err="1">
-                    <a:solidFill>
-                      <a:srgbClr val="70AD47"/>
-                    </a:solidFill>
-                    <a:latin typeface="맑은 고딕" panose="020B0503020000020004" pitchFamily="50" charset="-127"/>
-                    <a:ea typeface="맑은 고딕" panose="020B0503020000020004" pitchFamily="50" charset="-127"/>
-                    <a:cs typeface="Pretendard Variable" pitchFamily="34" charset="-120"/>
-                  </a:rPr>
-                  <a:t>가능성’</a:t>
-                </a:r>
-                <a:r>
-                  <a:rPr lang="en-US" altLang="ko-KR" sz="1200" dirty="0" err="1">
-                    <a:solidFill>
-                      <a:srgbClr val="1A1A1A"/>
-                    </a:solidFill>
-                    <a:latin typeface="맑은 고딕" panose="020B0503020000020004" pitchFamily="50" charset="-127"/>
-                    <a:ea typeface="맑은 고딕" panose="020B0503020000020004" pitchFamily="50" charset="-127"/>
-                    <a:cs typeface="Pretendard Variable" pitchFamily="34" charset="-120"/>
-                  </a:rPr>
-                  <a:t>을</a:t>
-                </a:r>
-                <a:r>
-                  <a:rPr lang="en-US" altLang="ko-KR" sz="1200" dirty="0">
-                    <a:solidFill>
-                      <a:srgbClr val="1A1A1A"/>
-                    </a:solidFill>
-                    <a:latin typeface="맑은 고딕" panose="020B0503020000020004" pitchFamily="50" charset="-127"/>
-                    <a:ea typeface="맑은 고딕" panose="020B0503020000020004" pitchFamily="50" charset="-127"/>
-                    <a:cs typeface="Pretendard Variable" pitchFamily="34" charset="-120"/>
-                  </a:rPr>
-                  <a:t> </a:t>
-                </a:r>
-                <a:r>
-                  <a:rPr lang="en-US" altLang="ko-KR" sz="1200" dirty="0" err="1">
-                    <a:solidFill>
-                      <a:srgbClr val="1A1A1A"/>
-                    </a:solidFill>
-                    <a:latin typeface="맑은 고딕" panose="020B0503020000020004" pitchFamily="50" charset="-127"/>
-                    <a:ea typeface="맑은 고딕" panose="020B0503020000020004" pitchFamily="50" charset="-127"/>
-                    <a:cs typeface="Pretendard Variable" pitchFamily="34" charset="-120"/>
-                  </a:rPr>
-                  <a:t>스스로</a:t>
-                </a:r>
-                <a:r>
-                  <a:rPr lang="en-US" altLang="ko-KR" sz="1200" dirty="0">
-                    <a:solidFill>
-                      <a:srgbClr val="1A1A1A"/>
-                    </a:solidFill>
-                    <a:latin typeface="맑은 고딕" panose="020B0503020000020004" pitchFamily="50" charset="-127"/>
-                    <a:ea typeface="맑은 고딕" panose="020B0503020000020004" pitchFamily="50" charset="-127"/>
-                    <a:cs typeface="Pretendard Variable" pitchFamily="34" charset="-120"/>
-                  </a:rPr>
-                  <a:t> </a:t>
-                </a:r>
-                <a:r>
-                  <a:rPr lang="en-US" altLang="ko-KR" sz="1200" dirty="0" err="1">
-                    <a:solidFill>
-                      <a:srgbClr val="1A1A1A"/>
-                    </a:solidFill>
-                    <a:latin typeface="맑은 고딕" panose="020B0503020000020004" pitchFamily="50" charset="-127"/>
-                    <a:ea typeface="맑은 고딕" panose="020B0503020000020004" pitchFamily="50" charset="-127"/>
-                    <a:cs typeface="Pretendard Variable" pitchFamily="34" charset="-120"/>
-                  </a:rPr>
-                  <a:t>판단하게</a:t>
-                </a:r>
-                <a:r>
-                  <a:rPr lang="en-US" altLang="ko-KR" sz="1200" dirty="0">
-                    <a:solidFill>
-                      <a:srgbClr val="1A1A1A"/>
-                    </a:solidFill>
-                    <a:latin typeface="맑은 고딕" panose="020B0503020000020004" pitchFamily="50" charset="-127"/>
-                    <a:ea typeface="맑은 고딕" panose="020B0503020000020004" pitchFamily="50" charset="-127"/>
-                    <a:cs typeface="Pretendard Variable" pitchFamily="34" charset="-120"/>
-                  </a:rPr>
-                  <a:t> </a:t>
-                </a:r>
-                <a:r>
-                  <a:rPr lang="en-US" altLang="ko-KR" sz="1200" dirty="0" err="1">
-                    <a:solidFill>
-                      <a:srgbClr val="1A1A1A"/>
-                    </a:solidFill>
-                    <a:latin typeface="맑은 고딕" panose="020B0503020000020004" pitchFamily="50" charset="-127"/>
-                    <a:ea typeface="맑은 고딕" panose="020B0503020000020004" pitchFamily="50" charset="-127"/>
-                    <a:cs typeface="Pretendard Variable" pitchFamily="34" charset="-120"/>
-                  </a:rPr>
-                  <a:t>됩니다</a:t>
-                </a:r>
-                <a:r>
-                  <a:rPr lang="en-US" altLang="ko-KR" sz="1200" dirty="0">
-                    <a:solidFill>
-                      <a:srgbClr val="1A1A1A"/>
-                    </a:solidFill>
-                    <a:latin typeface="맑은 고딕" panose="020B0503020000020004" pitchFamily="50" charset="-127"/>
-                    <a:ea typeface="맑은 고딕" panose="020B0503020000020004" pitchFamily="50" charset="-127"/>
-                    <a:cs typeface="Pretendard Variable" pitchFamily="34" charset="-120"/>
-                  </a:rPr>
-                  <a:t>. 이 </a:t>
-                </a:r>
-                <a:r>
-                  <a:rPr lang="en-US" altLang="ko-KR" sz="1200" dirty="0" err="1">
-                    <a:solidFill>
-                      <a:srgbClr val="1A1A1A"/>
-                    </a:solidFill>
-                    <a:latin typeface="맑은 고딕" panose="020B0503020000020004" pitchFamily="50" charset="-127"/>
-                    <a:ea typeface="맑은 고딕" panose="020B0503020000020004" pitchFamily="50" charset="-127"/>
-                    <a:cs typeface="Pretendard Variable" pitchFamily="34" charset="-120"/>
-                  </a:rPr>
-                  <a:t>선택이</a:t>
-                </a:r>
-                <a:r>
-                  <a:rPr lang="en-US" altLang="ko-KR" sz="1200" dirty="0">
-                    <a:solidFill>
-                      <a:srgbClr val="1A1A1A"/>
-                    </a:solidFill>
-                    <a:latin typeface="맑은 고딕" panose="020B0503020000020004" pitchFamily="50" charset="-127"/>
-                    <a:ea typeface="맑은 고딕" panose="020B0503020000020004" pitchFamily="50" charset="-127"/>
-                    <a:cs typeface="Pretendard Variable" pitchFamily="34" charset="-120"/>
-                  </a:rPr>
-                  <a:t> 곧 AI </a:t>
-                </a:r>
-                <a:r>
-                  <a:rPr lang="en-US" altLang="ko-KR" sz="1200" dirty="0" err="1">
-                    <a:solidFill>
-                      <a:srgbClr val="1A1A1A"/>
-                    </a:solidFill>
-                    <a:latin typeface="맑은 고딕" panose="020B0503020000020004" pitchFamily="50" charset="-127"/>
-                    <a:ea typeface="맑은 고딕" panose="020B0503020000020004" pitchFamily="50" charset="-127"/>
-                    <a:cs typeface="Pretendard Variable" pitchFamily="34" charset="-120"/>
-                  </a:rPr>
-                  <a:t>활용</a:t>
-                </a:r>
-                <a:r>
-                  <a:rPr lang="en-US" altLang="ko-KR" sz="1200" dirty="0">
-                    <a:solidFill>
-                      <a:srgbClr val="1A1A1A"/>
-                    </a:solidFill>
-                    <a:latin typeface="맑은 고딕" panose="020B0503020000020004" pitchFamily="50" charset="-127"/>
-                    <a:ea typeface="맑은 고딕" panose="020B0503020000020004" pitchFamily="50" charset="-127"/>
-                    <a:cs typeface="Pretendard Variable" pitchFamily="34" charset="-120"/>
-                  </a:rPr>
-                  <a:t> </a:t>
-                </a:r>
-                <a:r>
-                  <a:rPr lang="en-US" altLang="ko-KR" sz="1200" dirty="0" err="1">
-                    <a:solidFill>
-                      <a:srgbClr val="1A1A1A"/>
-                    </a:solidFill>
-                    <a:latin typeface="맑은 고딕" panose="020B0503020000020004" pitchFamily="50" charset="-127"/>
-                    <a:ea typeface="맑은 고딕" panose="020B0503020000020004" pitchFamily="50" charset="-127"/>
-                    <a:cs typeface="Pretendard Variable" pitchFamily="34" charset="-120"/>
-                  </a:rPr>
-                  <a:t>방식</a:t>
-                </a:r>
-                <a:r>
-                  <a:rPr lang="en-US" altLang="ko-KR" sz="1200" dirty="0">
-                    <a:solidFill>
-                      <a:srgbClr val="1A1A1A"/>
-                    </a:solidFill>
-                    <a:latin typeface="맑은 고딕" panose="020B0503020000020004" pitchFamily="50" charset="-127"/>
-                    <a:ea typeface="맑은 고딕" panose="020B0503020000020004" pitchFamily="50" charset="-127"/>
-                    <a:cs typeface="Pretendard Variable" pitchFamily="34" charset="-120"/>
-                  </a:rPr>
-                  <a:t> </a:t>
-                </a:r>
-                <a:r>
-                  <a:rPr lang="en-US" altLang="ko-KR" sz="1200" dirty="0" err="1">
-                    <a:solidFill>
-                      <a:srgbClr val="1A1A1A"/>
-                    </a:solidFill>
-                    <a:latin typeface="맑은 고딕" panose="020B0503020000020004" pitchFamily="50" charset="-127"/>
-                    <a:ea typeface="맑은 고딕" panose="020B0503020000020004" pitchFamily="50" charset="-127"/>
-                    <a:cs typeface="Pretendard Variable" pitchFamily="34" charset="-120"/>
-                  </a:rPr>
-                  <a:t>설계입니다</a:t>
-                </a:r>
-                <a:r>
-                  <a:rPr lang="en-US" altLang="ko-KR" sz="1200" dirty="0">
-                    <a:solidFill>
-                      <a:srgbClr val="1A1A1A"/>
-                    </a:solidFill>
-                    <a:latin typeface="맑은 고딕" panose="020B0503020000020004" pitchFamily="50" charset="-127"/>
-                    <a:ea typeface="맑은 고딕" panose="020B0503020000020004" pitchFamily="50" charset="-127"/>
-                    <a:cs typeface="Pretendard Variable" pitchFamily="34" charset="-120"/>
-                  </a:rPr>
-                  <a:t>.</a:t>
-                </a:r>
-                <a:endParaRPr lang="en-US" altLang="ko-KR" sz="1200" dirty="0">
-                  <a:latin typeface="맑은 고딕" panose="020B0503020000020004" pitchFamily="50" charset="-127"/>
-                  <a:ea typeface="맑은 고딕" panose="020B0503020000020004" pitchFamily="50" charset="-127"/>
+                <a:endParaRPr lang="en-US" altLang="ko-KR" sz="1200">
+                  <a:latin typeface="맑은 고딕"/>
+                  <a:ea typeface="맑은 고딕"/>
                 </a:endParaRPr>
               </a:p>
             </p:txBody>
@@ -1901,19 +1377,13 @@
         </p:grpSp>
         <p:sp>
           <p:nvSpPr>
-            <p:cNvPr id="123" name="직사각형 122">
-              <a:extLst>
-                <a:ext uri="{FF2B5EF4-FFF2-40B4-BE49-F238E27FC236}">
-                  <a16:creationId xmlns:a16="http://schemas.microsoft.com/office/drawing/2014/main" id="{87DEDDD4-7F8E-9774-58DB-6DECF9224E00}"/>
-                </a:ext>
-              </a:extLst>
-            </p:cNvPr>
+            <p:cNvPr id="123" name="직사각형 122"/>
             <p:cNvSpPr/>
             <p:nvPr/>
           </p:nvSpPr>
           <p:spPr>
             <a:xfrm>
-              <a:off x="800253" y="3240175"/>
+              <a:off x="800252" y="3240175"/>
               <a:ext cx="7201661" cy="1039216"/>
             </a:xfrm>
             <a:prstGeom prst="rect">
@@ -1945,10 +1415,10 @@
             </a:fontRef>
           </p:style>
           <p:txBody>
-            <a:bodyPr rtlCol="0" anchor="ctr"/>
+            <a:bodyPr anchor="ctr"/>
             <a:lstStyle/>
             <a:p>
-              <a:pPr marL="0" marR="0" lvl="0" indent="0" algn="l" defTabSz="914400" rtl="0" eaLnBrk="1" fontAlgn="auto" latinLnBrk="1" hangingPunct="1">
+              <a:pPr marL="0" marR="0" lvl="0" indent="0" algn="l" defTabSz="914400" rtl="0" eaLnBrk="1" latinLnBrk="1" hangingPunct="1">
                 <a:lnSpc>
                   <a:spcPct val="100000"/>
                 </a:lnSpc>
@@ -1959,207 +1429,20 @@
                   <a:spcPts val="0"/>
                 </a:spcAft>
                 <a:buClrTx/>
-                <a:buSzTx/>
                 <a:buFontTx/>
                 <a:buNone/>
-                <a:tabLst/>
                 <a:defRPr/>
               </a:pPr>
-              <a:r>
-                <a:rPr kumimoji="0" lang="en-US" altLang="ko-KR" sz="1400" b="0" i="0" u="none" strike="noStrike" kern="1200" cap="none" spc="0" normalizeH="0" baseline="0" noProof="0" dirty="0">
-                  <a:ln>
-                    <a:noFill/>
-                  </a:ln>
-                  <a:solidFill>
-                    <a:schemeClr val="tx1"/>
-                  </a:solidFill>
-                  <a:effectLst/>
-                  <a:uLnTx/>
-                  <a:uFillTx/>
-                  <a:latin typeface="맑은 고딕" panose="020B0503020000020004" pitchFamily="50" charset="-127"/>
-                  <a:ea typeface="맑은 고딕" panose="020B0503020000020004" pitchFamily="50" charset="-127"/>
-                  <a:cs typeface="Pretendard Variable" pitchFamily="34" charset="-120"/>
-                </a:rPr>
-                <a:t>□  H-Chat </a:t>
-              </a:r>
-              <a:r>
-                <a:rPr kumimoji="0" lang="en-US" altLang="ko-KR" sz="1400" b="0" i="0" u="none" strike="noStrike" kern="1200" cap="none" spc="0" normalizeH="0" baseline="0" noProof="0" dirty="0" err="1">
-                  <a:ln>
-                    <a:noFill/>
-                  </a:ln>
-                  <a:solidFill>
-                    <a:schemeClr val="tx1"/>
-                  </a:solidFill>
-                  <a:effectLst/>
-                  <a:uLnTx/>
-                  <a:uFillTx/>
-                  <a:latin typeface="맑은 고딕" panose="020B0503020000020004" pitchFamily="50" charset="-127"/>
-                  <a:ea typeface="맑은 고딕" panose="020B0503020000020004" pitchFamily="50" charset="-127"/>
-                  <a:cs typeface="Pretendard Variable" pitchFamily="34" charset="-120"/>
-                </a:rPr>
-                <a:t>프로젝트</a:t>
-              </a:r>
-              <a:r>
-                <a:rPr kumimoji="0" lang="en-US" altLang="ko-KR" sz="1400" b="0" i="0" u="none" strike="noStrike" kern="1200" cap="none" spc="0" normalizeH="0" baseline="0" noProof="0" dirty="0">
-                  <a:ln>
-                    <a:noFill/>
-                  </a:ln>
-                  <a:solidFill>
-                    <a:schemeClr val="tx1"/>
-                  </a:solidFill>
-                  <a:effectLst/>
-                  <a:uLnTx/>
-                  <a:uFillTx/>
-                  <a:latin typeface="맑은 고딕" panose="020B0503020000020004" pitchFamily="50" charset="-127"/>
-                  <a:ea typeface="맑은 고딕" panose="020B0503020000020004" pitchFamily="50" charset="-127"/>
-                  <a:cs typeface="Pretendard Variable" pitchFamily="34" charset="-120"/>
-                </a:rPr>
-                <a:t>   □  CLAUDE.md (AI </a:t>
-              </a:r>
-              <a:r>
-                <a:rPr kumimoji="0" lang="en-US" altLang="ko-KR" sz="1400" b="0" i="0" u="none" strike="noStrike" kern="1200" cap="none" spc="0" normalizeH="0" baseline="0" noProof="0" dirty="0" err="1">
-                  <a:ln>
-                    <a:noFill/>
-                  </a:ln>
-                  <a:solidFill>
-                    <a:schemeClr val="tx1"/>
-                  </a:solidFill>
-                  <a:effectLst/>
-                  <a:uLnTx/>
-                  <a:uFillTx/>
-                  <a:latin typeface="맑은 고딕" panose="020B0503020000020004" pitchFamily="50" charset="-127"/>
-                  <a:ea typeface="맑은 고딕" panose="020B0503020000020004" pitchFamily="50" charset="-127"/>
-                  <a:cs typeface="Pretendard Variable" pitchFamily="34" charset="-120"/>
-                </a:rPr>
-                <a:t>지침</a:t>
-              </a:r>
-              <a:r>
-                <a:rPr kumimoji="0" lang="en-US" altLang="ko-KR" sz="1400" b="0" i="0" u="none" strike="noStrike" kern="1200" cap="none" spc="0" normalizeH="0" baseline="0" noProof="0" dirty="0">
-                  <a:ln>
-                    <a:noFill/>
-                  </a:ln>
-                  <a:solidFill>
-                    <a:schemeClr val="tx1"/>
-                  </a:solidFill>
-                  <a:effectLst/>
-                  <a:uLnTx/>
-                  <a:uFillTx/>
-                  <a:latin typeface="맑은 고딕" panose="020B0503020000020004" pitchFamily="50" charset="-127"/>
-                  <a:ea typeface="맑은 고딕" panose="020B0503020000020004" pitchFamily="50" charset="-127"/>
-                  <a:cs typeface="Pretendard Variable" pitchFamily="34" charset="-120"/>
-                </a:rPr>
-                <a:t>)   □  Skill   □  Sub-agent  </a:t>
-              </a:r>
-            </a:p>
-            <a:p>
-              <a:pPr marL="0" marR="0" lvl="0" indent="0" algn="l" defTabSz="914400" rtl="0" eaLnBrk="1" fontAlgn="auto" latinLnBrk="1" hangingPunct="1">
-                <a:lnSpc>
-                  <a:spcPct val="100000"/>
-                </a:lnSpc>
-                <a:spcBef>
-                  <a:spcPts val="0"/>
-                </a:spcBef>
-                <a:spcAft>
-                  <a:spcPts val="0"/>
-                </a:spcAft>
-                <a:buClrTx/>
-                <a:buSzTx/>
-                <a:buFontTx/>
-                <a:buNone/>
-                <a:tabLst/>
-                <a:defRPr/>
-              </a:pPr>
-              <a:r>
-                <a:rPr kumimoji="0" lang="en-US" altLang="ko-KR" sz="1400" b="0" i="0" u="none" strike="noStrike" kern="1200" cap="none" spc="0" normalizeH="0" baseline="0" noProof="0" dirty="0">
-                  <a:ln>
-                    <a:noFill/>
-                  </a:ln>
-                  <a:solidFill>
-                    <a:schemeClr val="tx1"/>
-                  </a:solidFill>
-                  <a:effectLst/>
-                  <a:uLnTx/>
-                  <a:uFillTx/>
-                  <a:latin typeface="맑은 고딕" panose="020B0503020000020004" pitchFamily="50" charset="-127"/>
-                  <a:ea typeface="맑은 고딕" panose="020B0503020000020004" pitchFamily="50" charset="-127"/>
-                  <a:cs typeface="Pretendard Variable" pitchFamily="34" charset="-120"/>
-                </a:rPr>
-                <a:t>□  </a:t>
-              </a:r>
-              <a:r>
-                <a:rPr kumimoji="0" lang="en-US" altLang="ko-KR" sz="1400" b="0" i="0" u="none" strike="noStrike" kern="1200" cap="none" spc="0" normalizeH="0" baseline="0" noProof="0" dirty="0" err="1">
-                  <a:ln>
-                    <a:noFill/>
-                  </a:ln>
-                  <a:solidFill>
-                    <a:schemeClr val="tx1"/>
-                  </a:solidFill>
-                  <a:effectLst/>
-                  <a:uLnTx/>
-                  <a:uFillTx/>
-                  <a:latin typeface="맑은 고딕" panose="020B0503020000020004" pitchFamily="50" charset="-127"/>
-                  <a:ea typeface="맑은 고딕" panose="020B0503020000020004" pitchFamily="50" charset="-127"/>
-                  <a:cs typeface="Pretendard Variable" pitchFamily="34" charset="-120"/>
-                </a:rPr>
-                <a:t>대시보드</a:t>
-              </a:r>
-              <a:r>
-                <a:rPr kumimoji="0" lang="en-US" altLang="ko-KR" sz="1400" b="0" i="0" u="none" strike="noStrike" kern="1200" cap="none" spc="0" normalizeH="0" baseline="0" noProof="0" dirty="0">
-                  <a:ln>
-                    <a:noFill/>
-                  </a:ln>
-                  <a:solidFill>
-                    <a:schemeClr val="tx1"/>
-                  </a:solidFill>
-                  <a:effectLst/>
-                  <a:uLnTx/>
-                  <a:uFillTx/>
-                  <a:latin typeface="맑은 고딕" panose="020B0503020000020004" pitchFamily="50" charset="-127"/>
-                  <a:ea typeface="맑은 고딕" panose="020B0503020000020004" pitchFamily="50" charset="-127"/>
-                  <a:cs typeface="Pretendard Variable" pitchFamily="34" charset="-120"/>
-                </a:rPr>
-                <a:t> □ </a:t>
-              </a:r>
-              <a:r>
-                <a:rPr kumimoji="0" lang="ko-KR" altLang="en-US" sz="1400" b="0" i="0" u="none" strike="noStrike" kern="1200" cap="none" spc="0" normalizeH="0" baseline="0" noProof="0" dirty="0">
-                  <a:ln>
-                    <a:noFill/>
-                  </a:ln>
-                  <a:solidFill>
-                    <a:schemeClr val="tx1"/>
-                  </a:solidFill>
-                  <a:effectLst/>
-                  <a:uLnTx/>
-                  <a:uFillTx/>
-                  <a:latin typeface="맑은 고딕" panose="020B0503020000020004" pitchFamily="50" charset="-127"/>
-                  <a:ea typeface="맑은 고딕" panose="020B0503020000020004" pitchFamily="50" charset="-127"/>
-                  <a:cs typeface="Pretendard Variable" pitchFamily="34" charset="-120"/>
-                </a:rPr>
-                <a:t>기타</a:t>
-              </a:r>
-              <a:r>
-                <a:rPr kumimoji="0" lang="en-US" altLang="ko-KR" sz="1400" b="0" i="0" u="none" strike="noStrike" kern="1200" cap="none" spc="0" normalizeH="0" baseline="0" noProof="0" dirty="0">
-                  <a:ln>
-                    <a:noFill/>
-                  </a:ln>
-                  <a:solidFill>
-                    <a:schemeClr val="tx1"/>
-                  </a:solidFill>
-                  <a:effectLst/>
-                  <a:uLnTx/>
-                  <a:uFillTx/>
-                  <a:latin typeface="맑은 고딕" panose="020B0503020000020004" pitchFamily="50" charset="-127"/>
-                  <a:ea typeface="맑은 고딕" panose="020B0503020000020004" pitchFamily="50" charset="-127"/>
-                  <a:cs typeface="Pretendard Variable" pitchFamily="34" charset="-120"/>
-                </a:rPr>
-                <a:t>(    )</a:t>
-              </a:r>
-              <a:endParaRPr lang="ko-KR" altLang="en-US" dirty="0">
+              <a:endParaRPr kumimoji="0" lang="en-US" altLang="ko-KR" sz="1400" b="0" i="0" u="none" strike="noStrike" kern="1200" cap="none" spc="0" normalizeH="0" baseline="0">
                 <a:solidFill>
                   <a:schemeClr val="tx1"/>
                 </a:solidFill>
-                <a:latin typeface="맑은 고딕" panose="020B0503020000020004" pitchFamily="50" charset="-127"/>
-                <a:ea typeface="맑은 고딕" panose="020B0503020000020004" pitchFamily="50" charset="-127"/>
+                <a:effectLst/>
+                <a:uLnTx/>
+                <a:uFillTx/>
+                <a:latin typeface="맑은 고딕"/>
+                <a:ea typeface="맑은 고딕"/>
+                <a:cs typeface="Pretendard Variable"/>
               </a:endParaRPr>
             </a:p>
           </p:txBody>
@@ -2167,13 +1450,7 @@
       </p:grpSp>
       <p:grpSp>
         <p:nvGrpSpPr>
-          <p:cNvPr id="136" name="그룹 135">
-            <a:extLst>
-              <a:ext uri="{FF2B5EF4-FFF2-40B4-BE49-F238E27FC236}">
-                <a16:creationId xmlns:a16="http://schemas.microsoft.com/office/drawing/2014/main" id="{B9718D90-B361-AB3B-458C-CC409CEBB1FD}"/>
-              </a:ext>
-            </a:extLst>
-          </p:cNvPr>
+          <p:cNvPr id="136" name="그룹 135"/>
           <p:cNvGrpSpPr/>
           <p:nvPr/>
         </p:nvGrpSpPr>
@@ -2187,13 +1464,7 @@
         </p:grpSpPr>
         <p:sp>
           <p:nvSpPr>
-            <p:cNvPr id="126" name="Text 14">
-              <a:extLst>
-                <a:ext uri="{FF2B5EF4-FFF2-40B4-BE49-F238E27FC236}">
-                  <a16:creationId xmlns:a16="http://schemas.microsoft.com/office/drawing/2014/main" id="{125DBA5C-B5C4-D8CD-57D5-5102922C08DD}"/>
-                </a:ext>
-              </a:extLst>
-            </p:cNvPr>
+            <p:cNvPr id="126" name="Text 14"/>
             <p:cNvSpPr txBox="1"/>
             <p:nvPr/>
           </p:nvSpPr>
@@ -2209,50 +1480,45 @@
             <a:ln/>
           </p:spPr>
           <p:txBody>
-            <a:bodyPr wrap="none" lIns="0" tIns="0" rIns="0" bIns="0" rtlCol="0" anchor="ctr"/>
+            <a:bodyPr wrap="none" lIns="0" tIns="0" rIns="0" bIns="0" anchor="ctr"/>
             <a:lstStyle/>
             <a:p>
               <a:pPr marL="0" indent="0" algn="l">
                 <a:buNone/>
+                <a:defRPr/>
               </a:pPr>
               <a:r>
-                <a:rPr lang="en-US" sz="2400" b="1" kern="0" spc="-84" dirty="0">
+                <a:rPr lang="en-US" sz="2400" b="1" kern="0" spc="-84">
                   <a:solidFill>
                     <a:srgbClr val="164194"/>
                   </a:solidFill>
-                  <a:latin typeface="맑은 고딕" panose="020B0503020000020004" pitchFamily="50" charset="-127"/>
-                  <a:ea typeface="맑은 고딕" panose="020B0503020000020004" pitchFamily="50" charset="-127"/>
-                  <a:cs typeface="Pretendard Variable" pitchFamily="34" charset="-120"/>
+                  <a:latin typeface="맑은 고딕"/>
+                  <a:ea typeface="맑은 고딕"/>
+                  <a:cs typeface="Pretendard Variable"/>
                 </a:rPr>
                 <a:t>0</a:t>
               </a:r>
               <a:r>
-                <a:rPr lang="en-US" altLang="ko-KR" sz="2400" b="1" kern="0" spc="-84" dirty="0">
+                <a:rPr lang="en-US" altLang="ko-KR" sz="2400" b="1" kern="0" spc="-84">
                   <a:solidFill>
                     <a:srgbClr val="164194"/>
                   </a:solidFill>
-                  <a:latin typeface="맑은 고딕" panose="020B0503020000020004" pitchFamily="50" charset="-127"/>
-                  <a:ea typeface="맑은 고딕" panose="020B0503020000020004" pitchFamily="50" charset="-127"/>
-                  <a:cs typeface="Pretendard Variable" pitchFamily="34" charset="-120"/>
+                  <a:latin typeface="맑은 고딕"/>
+                  <a:ea typeface="맑은 고딕"/>
+                  <a:cs typeface="Pretendard Variable"/>
                 </a:rPr>
                 <a:t>3</a:t>
               </a:r>
-              <a:endParaRPr lang="en-US" sz="2400" dirty="0">
-                <a:latin typeface="맑은 고딕" panose="020B0503020000020004" pitchFamily="50" charset="-127"/>
-                <a:ea typeface="맑은 고딕" panose="020B0503020000020004" pitchFamily="50" charset="-127"/>
+              <a:endParaRPr lang="en-US" sz="2400">
+                <a:latin typeface="맑은 고딕"/>
+                <a:ea typeface="맑은 고딕"/>
               </a:endParaRPr>
             </a:p>
           </p:txBody>
         </p:sp>
         <p:sp>
           <p:nvSpPr>
-            <p:cNvPr id="127" name="Text 16">
-              <a:extLst>
-                <a:ext uri="{FF2B5EF4-FFF2-40B4-BE49-F238E27FC236}">
-                  <a16:creationId xmlns:a16="http://schemas.microsoft.com/office/drawing/2014/main" id="{29523A85-AFEF-8422-20F5-AD9F30754135}"/>
-                </a:ext>
-              </a:extLst>
-            </p:cNvPr>
+            <p:cNvPr id="127" name="Text 16"/>
             <p:cNvSpPr txBox="1"/>
             <p:nvPr/>
           </p:nvSpPr>
@@ -2268,146 +1534,44 @@
             <a:ln/>
           </p:spPr>
           <p:txBody>
-            <a:bodyPr wrap="none" lIns="0" tIns="0" rIns="0" bIns="0" rtlCol="0" anchor="ctr"/>
+            <a:bodyPr wrap="none" lIns="0" tIns="0" rIns="0" bIns="0" anchor="ctr"/>
             <a:lstStyle/>
             <a:p>
-              <a:r>
-                <a:rPr lang="en-US" altLang="ko-KR" sz="1400" b="1" dirty="0" err="1">
+              <a:pPr lvl="0">
+                <a:defRPr/>
+              </a:pPr>
+              <a:r>
+                <a:rPr lang="en-US" altLang="ko-KR" sz="1400" b="1">
                   <a:solidFill>
                     <a:srgbClr val="1A1A1A"/>
                   </a:solidFill>
-                  <a:latin typeface="맑은 고딕" panose="020B0503020000020004" pitchFamily="50" charset="-127"/>
-                  <a:ea typeface="맑은 고딕" panose="020B0503020000020004" pitchFamily="50" charset="-127"/>
-                  <a:cs typeface="Pretendard Variable" pitchFamily="34" charset="-120"/>
-                </a:rPr>
-                <a:t>기대</a:t>
-              </a:r>
-              <a:r>
-                <a:rPr lang="en-US" altLang="ko-KR" sz="1400" b="1" dirty="0">
-                  <a:solidFill>
-                    <a:srgbClr val="1A1A1A"/>
-                  </a:solidFill>
-                  <a:latin typeface="맑은 고딕" panose="020B0503020000020004" pitchFamily="50" charset="-127"/>
-                  <a:ea typeface="맑은 고딕" panose="020B0503020000020004" pitchFamily="50" charset="-127"/>
-                  <a:cs typeface="Pretendard Variable" pitchFamily="34" charset="-120"/>
-                </a:rPr>
-                <a:t> </a:t>
-              </a:r>
-              <a:r>
-                <a:rPr lang="en-US" altLang="ko-KR" sz="1400" b="1" dirty="0" err="1">
-                  <a:solidFill>
-                    <a:srgbClr val="1A1A1A"/>
-                  </a:solidFill>
-                  <a:latin typeface="맑은 고딕" panose="020B0503020000020004" pitchFamily="50" charset="-127"/>
-                  <a:ea typeface="맑은 고딕" panose="020B0503020000020004" pitchFamily="50" charset="-127"/>
-                  <a:cs typeface="Pretendard Variable" pitchFamily="34" charset="-120"/>
-                </a:rPr>
-                <a:t>결과물</a:t>
-              </a:r>
-              <a:r>
-                <a:rPr lang="en-US" altLang="ko-KR" sz="1400" b="1" dirty="0">
-                  <a:solidFill>
-                    <a:srgbClr val="1A1A1A"/>
-                  </a:solidFill>
-                  <a:latin typeface="맑은 고딕" panose="020B0503020000020004" pitchFamily="50" charset="-127"/>
-                  <a:ea typeface="맑은 고딕" panose="020B0503020000020004" pitchFamily="50" charset="-127"/>
-                  <a:cs typeface="Pretendard Variable" pitchFamily="34" charset="-120"/>
-                </a:rPr>
-                <a:t> </a:t>
-              </a:r>
-              <a:r>
-                <a:rPr lang="en-US" altLang="ko-KR" sz="1400" b="1" dirty="0">
+                  <a:latin typeface="맑은 고딕"/>
+                  <a:ea typeface="맑은 고딕"/>
+                  <a:cs typeface="Pretendard Variable"/>
+                </a:rPr>
+                <a:t>기대 결과물 </a:t>
+              </a:r>
+              <a:r>
+                <a:rPr lang="en-US" altLang="ko-KR" sz="1400" b="1">
                   <a:solidFill>
                     <a:srgbClr val="9AA6B8"/>
                   </a:solidFill>
-                  <a:latin typeface="맑은 고딕" panose="020B0503020000020004" pitchFamily="50" charset="-127"/>
-                  <a:ea typeface="맑은 고딕" panose="020B0503020000020004" pitchFamily="50" charset="-127"/>
-                  <a:cs typeface="Pretendard Variable" pitchFamily="34" charset="-120"/>
-                </a:rPr>
-                <a:t>(</a:t>
-              </a:r>
-              <a:r>
-                <a:rPr lang="en-US" altLang="ko-KR" sz="1400" b="1" dirty="0" err="1">
-                  <a:solidFill>
-                    <a:srgbClr val="9AA6B8"/>
-                  </a:solidFill>
-                  <a:latin typeface="맑은 고딕" panose="020B0503020000020004" pitchFamily="50" charset="-127"/>
-                  <a:ea typeface="맑은 고딕" panose="020B0503020000020004" pitchFamily="50" charset="-127"/>
-                  <a:cs typeface="Pretendard Variable" pitchFamily="34" charset="-120"/>
-                </a:rPr>
-                <a:t>산출물</a:t>
-              </a:r>
-              <a:r>
-                <a:rPr lang="en-US" altLang="ko-KR" sz="1400" b="1" dirty="0">
-                  <a:solidFill>
-                    <a:srgbClr val="9AA6B8"/>
-                  </a:solidFill>
-                  <a:latin typeface="맑은 고딕" panose="020B0503020000020004" pitchFamily="50" charset="-127"/>
-                  <a:ea typeface="맑은 고딕" panose="020B0503020000020004" pitchFamily="50" charset="-127"/>
-                  <a:cs typeface="Pretendard Variable" pitchFamily="34" charset="-120"/>
-                </a:rPr>
-                <a:t> 1종 + </a:t>
-              </a:r>
-              <a:r>
-                <a:rPr lang="en-US" altLang="ko-KR" sz="1400" b="1" dirty="0" err="1">
-                  <a:solidFill>
-                    <a:srgbClr val="9AA6B8"/>
-                  </a:solidFill>
-                  <a:latin typeface="맑은 고딕" panose="020B0503020000020004" pitchFamily="50" charset="-127"/>
-                  <a:ea typeface="맑은 고딕" panose="020B0503020000020004" pitchFamily="50" charset="-127"/>
-                  <a:cs typeface="Pretendard Variable" pitchFamily="34" charset="-120"/>
-                </a:rPr>
-                <a:t>절감</a:t>
-              </a:r>
-              <a:r>
-                <a:rPr lang="en-US" altLang="ko-KR" sz="1400" b="1" dirty="0">
-                  <a:solidFill>
-                    <a:srgbClr val="9AA6B8"/>
-                  </a:solidFill>
-                  <a:latin typeface="맑은 고딕" panose="020B0503020000020004" pitchFamily="50" charset="-127"/>
-                  <a:ea typeface="맑은 고딕" panose="020B0503020000020004" pitchFamily="50" charset="-127"/>
-                  <a:cs typeface="Pretendard Variable" pitchFamily="34" charset="-120"/>
-                </a:rPr>
-                <a:t> </a:t>
-              </a:r>
-              <a:r>
-                <a:rPr lang="en-US" altLang="ko-KR" sz="1400" b="1" dirty="0" err="1">
-                  <a:solidFill>
-                    <a:srgbClr val="9AA6B8"/>
-                  </a:solidFill>
-                  <a:latin typeface="맑은 고딕" panose="020B0503020000020004" pitchFamily="50" charset="-127"/>
-                  <a:ea typeface="맑은 고딕" panose="020B0503020000020004" pitchFamily="50" charset="-127"/>
-                  <a:cs typeface="Pretendard Variable" pitchFamily="34" charset="-120"/>
-                </a:rPr>
-                <a:t>시간</a:t>
-              </a:r>
-              <a:r>
-                <a:rPr lang="en-US" altLang="ko-KR" sz="1400" b="1" dirty="0">
-                  <a:solidFill>
-                    <a:srgbClr val="9AA6B8"/>
-                  </a:solidFill>
-                  <a:latin typeface="맑은 고딕" panose="020B0503020000020004" pitchFamily="50" charset="-127"/>
-                  <a:ea typeface="맑은 고딕" panose="020B0503020000020004" pitchFamily="50" charset="-127"/>
-                  <a:cs typeface="Pretendard Variable" pitchFamily="34" charset="-120"/>
-                </a:rPr>
-                <a:t>)</a:t>
-              </a:r>
-              <a:endParaRPr lang="en-US" altLang="ko-KR" sz="1400" dirty="0">
-                <a:latin typeface="맑은 고딕" panose="020B0503020000020004" pitchFamily="50" charset="-127"/>
-                <a:ea typeface="맑은 고딕" panose="020B0503020000020004" pitchFamily="50" charset="-127"/>
+                  <a:latin typeface="맑은 고딕"/>
+                  <a:ea typeface="맑은 고딕"/>
+                  <a:cs typeface="Pretendard Variable"/>
+                </a:rPr>
+                <a:t>(산출물 1종 + 절감 시간)</a:t>
+              </a:r>
+              <a:endParaRPr lang="en-US" altLang="ko-KR" sz="1400">
+                <a:latin typeface="맑은 고딕"/>
+                <a:ea typeface="맑은 고딕"/>
               </a:endParaRPr>
             </a:p>
           </p:txBody>
         </p:sp>
         <p:grpSp>
           <p:nvGrpSpPr>
-            <p:cNvPr id="128" name="그룹 127">
-              <a:extLst>
-                <a:ext uri="{FF2B5EF4-FFF2-40B4-BE49-F238E27FC236}">
-                  <a16:creationId xmlns:a16="http://schemas.microsoft.com/office/drawing/2014/main" id="{9238E8E3-44DF-353E-9FED-437C83BEA845}"/>
-                </a:ext>
-              </a:extLst>
-            </p:cNvPr>
+            <p:cNvPr id="128" name="그룹 127"/>
             <p:cNvGrpSpPr/>
             <p:nvPr/>
           </p:nvGrpSpPr>
@@ -2421,22 +1585,18 @@
           </p:grpSpPr>
           <p:pic>
             <p:nvPicPr>
-              <p:cNvPr id="129" name="Image 9" descr="gen-dedup-a4f779325862798106cab1a6fb4b41f4.png">
-                <a:extLst>
-                  <a:ext uri="{FF2B5EF4-FFF2-40B4-BE49-F238E27FC236}">
-                    <a16:creationId xmlns:a16="http://schemas.microsoft.com/office/drawing/2014/main" id="{79FC77BF-9024-742E-A765-6F4228CC3899}"/>
-                  </a:ext>
-                </a:extLst>
-              </p:cNvPr>
+              <p:cNvPr id="129" name="Image 9" descr="gen-dedup-a4f779325862798106cab1a6fb4b41f4.png"/>
               <p:cNvPicPr>
                 <a:picLocks noChangeAspect="1"/>
               </p:cNvPicPr>
               <p:nvPr/>
             </p:nvPicPr>
-            <p:blipFill>
+            <p:blipFill rotWithShape="1">
               <a:blip r:embed="rId4"/>
-              <a:srcRect l="-26" r="-26"/>
-              <a:stretch/>
+              <a:srcRect l="-30" r="-30"/>
+              <a:stretch>
+                <a:fillRect/>
+              </a:stretch>
             </p:blipFill>
             <p:spPr>
               <a:xfrm>
@@ -2450,13 +1610,7 @@
           </p:pic>
           <p:sp>
             <p:nvSpPr>
-              <p:cNvPr id="130" name="Text 19">
-                <a:extLst>
-                  <a:ext uri="{FF2B5EF4-FFF2-40B4-BE49-F238E27FC236}">
-                    <a16:creationId xmlns:a16="http://schemas.microsoft.com/office/drawing/2014/main" id="{DF676725-9199-0F2A-9A06-FFE5DFD16AC3}"/>
-                  </a:ext>
-                </a:extLst>
-              </p:cNvPr>
+              <p:cNvPr id="130" name="Text 19"/>
               <p:cNvSpPr txBox="1"/>
               <p:nvPr/>
             </p:nvSpPr>
@@ -2472,39 +1626,34 @@
               <a:ln/>
             </p:spPr>
             <p:txBody>
-              <a:bodyPr wrap="none" lIns="0" tIns="0" rIns="0" bIns="0" rtlCol="0" anchor="ctr"/>
+              <a:bodyPr wrap="none" lIns="0" tIns="0" rIns="0" bIns="0" anchor="ctr"/>
               <a:lstStyle/>
               <a:p>
                 <a:pPr marL="0" indent="0" algn="l">
                   <a:buNone/>
+                  <a:defRPr/>
                 </a:pPr>
                 <a:r>
-                  <a:rPr lang="en-US" sz="1400" b="1" kern="0" spc="142" dirty="0">
+                  <a:rPr lang="en-US" sz="1400" b="1" kern="0" spc="142">
                     <a:solidFill>
                       <a:srgbClr val="70AD47"/>
                     </a:solidFill>
-                    <a:latin typeface="맑은 고딕" panose="020B0503020000020004" pitchFamily="50" charset="-127"/>
-                    <a:ea typeface="맑은 고딕" panose="020B0503020000020004" pitchFamily="50" charset="-127"/>
-                    <a:cs typeface="Pretendard Variable" pitchFamily="34" charset="-120"/>
+                    <a:latin typeface="맑은 고딕"/>
+                    <a:ea typeface="맑은 고딕"/>
+                    <a:cs typeface="Pretendard Variable"/>
                   </a:rPr>
                   <a:t>왜 작성하는가?</a:t>
                 </a:r>
-                <a:endParaRPr lang="en-US" sz="1400" dirty="0">
-                  <a:latin typeface="맑은 고딕" panose="020B0503020000020004" pitchFamily="50" charset="-127"/>
-                  <a:ea typeface="맑은 고딕" panose="020B0503020000020004" pitchFamily="50" charset="-127"/>
+                <a:endParaRPr lang="en-US" sz="1400">
+                  <a:latin typeface="맑은 고딕"/>
+                  <a:ea typeface="맑은 고딕"/>
                 </a:endParaRPr>
               </a:p>
             </p:txBody>
           </p:sp>
           <p:sp>
             <p:nvSpPr>
-              <p:cNvPr id="131" name="Text 20">
-                <a:extLst>
-                  <a:ext uri="{FF2B5EF4-FFF2-40B4-BE49-F238E27FC236}">
-                    <a16:creationId xmlns:a16="http://schemas.microsoft.com/office/drawing/2014/main" id="{672A72BB-CC65-C0F2-B392-4C6219AF9203}"/>
-                  </a:ext>
-                </a:extLst>
-              </p:cNvPr>
+              <p:cNvPr id="131" name="Text 20"/>
               <p:cNvSpPr txBox="1"/>
               <p:nvPr/>
             </p:nvSpPr>
@@ -2520,221 +1669,70 @@
               <a:ln/>
             </p:spPr>
             <p:txBody>
-              <a:bodyPr wrap="square" lIns="0" tIns="0" rIns="0" bIns="0" rtlCol="0" anchor="ctr"/>
+              <a:bodyPr wrap="square" lIns="0" tIns="0" rIns="0" bIns="0" anchor="ctr"/>
               <a:lstStyle/>
               <a:p>
+                <a:pPr lvl="0">
+                  <a:defRPr/>
+                </a:pPr>
                 <a:r>
-                  <a:rPr lang="en-US" altLang="ko-KR" sz="1200" dirty="0" err="1">
+                  <a:rPr lang="en-US" altLang="ko-KR" sz="1200">
                     <a:solidFill>
                       <a:srgbClr val="1A1A1A"/>
                     </a:solidFill>
-                    <a:latin typeface="맑은 고딕" panose="020B0503020000020004" pitchFamily="50" charset="-127"/>
-                    <a:ea typeface="맑은 고딕" panose="020B0503020000020004" pitchFamily="50" charset="-127"/>
-                    <a:cs typeface="Pretendard Variable" pitchFamily="34" charset="-120"/>
+                    <a:latin typeface="맑은 고딕"/>
+                    <a:ea typeface="맑은 고딕"/>
+                    <a:cs typeface="Pretendard Variable"/>
                   </a:rPr>
-                  <a:t>결과물을</a:t>
+                  <a:t>결과물을 </a:t>
                 </a:r>
                 <a:r>
-                  <a:rPr lang="en-US" altLang="ko-KR" sz="1200" dirty="0">
-                    <a:solidFill>
-                      <a:srgbClr val="1A1A1A"/>
-                    </a:solidFill>
-                    <a:latin typeface="맑은 고딕" panose="020B0503020000020004" pitchFamily="50" charset="-127"/>
-                    <a:ea typeface="맑은 고딕" panose="020B0503020000020004" pitchFamily="50" charset="-127"/>
-                    <a:cs typeface="Pretendard Variable" pitchFamily="34" charset="-120"/>
-                  </a:rPr>
-                  <a:t> </a:t>
-                </a:r>
-                <a:r>
-                  <a:rPr lang="en-US" altLang="ko-KR" sz="1200" b="1" dirty="0" err="1">
+                  <a:rPr lang="en-US" altLang="ko-KR" sz="1200" b="1">
                     <a:solidFill>
                       <a:srgbClr val="70AD47"/>
                     </a:solidFill>
-                    <a:latin typeface="맑은 고딕" panose="020B0503020000020004" pitchFamily="50" charset="-127"/>
-                    <a:ea typeface="맑은 고딕" panose="020B0503020000020004" pitchFamily="50" charset="-127"/>
-                    <a:cs typeface="Pretendard Variable" pitchFamily="34" charset="-120"/>
+                    <a:latin typeface="맑은 고딕"/>
+                    <a:ea typeface="맑은 고딕"/>
+                    <a:cs typeface="Pretendard Variable"/>
                   </a:rPr>
-                  <a:t>하나로</a:t>
+                  <a:t>하나로 </a:t>
                 </a:r>
                 <a:r>
-                  <a:rPr lang="en-US" altLang="ko-KR" sz="1200" b="1" dirty="0">
+                  <a:rPr lang="ko-KR" altLang="en-US" sz="1200" b="1">
                     <a:solidFill>
                       <a:srgbClr val="70AD47"/>
                     </a:solidFill>
-                    <a:latin typeface="맑은 고딕" panose="020B0503020000020004" pitchFamily="50" charset="-127"/>
-                    <a:ea typeface="맑은 고딕" panose="020B0503020000020004" pitchFamily="50" charset="-127"/>
-                    <a:cs typeface="Pretendard Variable" pitchFamily="34" charset="-120"/>
-                  </a:rPr>
-                  <a:t> </a:t>
-                </a:r>
-                <a:r>
-                  <a:rPr lang="ko-KR" altLang="en-US" sz="1200" b="1" dirty="0">
-                    <a:solidFill>
-                      <a:srgbClr val="70AD47"/>
-                    </a:solidFill>
-                    <a:latin typeface="맑은 고딕" panose="020B0503020000020004" pitchFamily="50" charset="-127"/>
-                    <a:ea typeface="맑은 고딕" panose="020B0503020000020004" pitchFamily="50" charset="-127"/>
-                    <a:cs typeface="Pretendard Variable" pitchFamily="34" charset="-120"/>
+                    <a:latin typeface="맑은 고딕"/>
+                    <a:ea typeface="맑은 고딕"/>
+                    <a:cs typeface="Pretendard Variable"/>
                   </a:rPr>
                   <a:t>지정해</a:t>
                 </a:r>
                 <a:r>
-                  <a:rPr lang="en-US" altLang="ko-KR" sz="1200" b="1" dirty="0">
+                  <a:rPr lang="en-US" altLang="ko-KR" sz="1200" b="1">
                     <a:solidFill>
                       <a:srgbClr val="70AD47"/>
                     </a:solidFill>
-                    <a:latin typeface="맑은 고딕" panose="020B0503020000020004" pitchFamily="50" charset="-127"/>
-                    <a:ea typeface="맑은 고딕" panose="020B0503020000020004" pitchFamily="50" charset="-127"/>
-                    <a:cs typeface="Pretendard Variable" pitchFamily="34" charset="-120"/>
+                    <a:latin typeface="맑은 고딕"/>
+                    <a:ea typeface="맑은 고딕"/>
+                    <a:cs typeface="Pretendard Variable"/>
                   </a:rPr>
                   <a:t>야</a:t>
                 </a:r>
                 <a:r>
-                  <a:rPr lang="en-US" altLang="ko-KR" sz="1200" dirty="0">
+                  <a:rPr lang="en-US" altLang="ko-KR" sz="1200">
                     <a:solidFill>
                       <a:srgbClr val="1A1A1A"/>
                     </a:solidFill>
-                    <a:latin typeface="맑은 고딕" panose="020B0503020000020004" pitchFamily="50" charset="-127"/>
-                    <a:ea typeface="맑은 고딕" panose="020B0503020000020004" pitchFamily="50" charset="-127"/>
-                    <a:cs typeface="Pretendard Variable" pitchFamily="34" charset="-120"/>
+                    <a:latin typeface="맑은 고딕"/>
+                    <a:ea typeface="맑은 고딕"/>
+                    <a:cs typeface="Pretendard Variable"/>
                   </a:rPr>
-                  <a:t> ‘</a:t>
+                  <a:t> ‘작게 시작’이 가능하고 효과를 측정할 수 있습니다.</a:t>
                 </a:r>
-                <a:r>
-                  <a:rPr lang="en-US" altLang="ko-KR" sz="1200" dirty="0" err="1">
-                    <a:solidFill>
-                      <a:srgbClr val="1A1A1A"/>
-                    </a:solidFill>
-                    <a:latin typeface="맑은 고딕" panose="020B0503020000020004" pitchFamily="50" charset="-127"/>
-                    <a:ea typeface="맑은 고딕" panose="020B0503020000020004" pitchFamily="50" charset="-127"/>
-                    <a:cs typeface="Pretendard Variable" pitchFamily="34" charset="-120"/>
-                  </a:rPr>
-                  <a:t>작게</a:t>
-                </a:r>
-                <a:r>
-                  <a:rPr lang="en-US" altLang="ko-KR" sz="1200" dirty="0">
-                    <a:solidFill>
-                      <a:srgbClr val="1A1A1A"/>
-                    </a:solidFill>
-                    <a:latin typeface="맑은 고딕" panose="020B0503020000020004" pitchFamily="50" charset="-127"/>
-                    <a:ea typeface="맑은 고딕" panose="020B0503020000020004" pitchFamily="50" charset="-127"/>
-                    <a:cs typeface="Pretendard Variable" pitchFamily="34" charset="-120"/>
-                  </a:rPr>
-                  <a:t> </a:t>
-                </a:r>
-                <a:r>
-                  <a:rPr lang="en-US" altLang="ko-KR" sz="1200" dirty="0" err="1">
-                    <a:solidFill>
-                      <a:srgbClr val="1A1A1A"/>
-                    </a:solidFill>
-                    <a:latin typeface="맑은 고딕" panose="020B0503020000020004" pitchFamily="50" charset="-127"/>
-                    <a:ea typeface="맑은 고딕" panose="020B0503020000020004" pitchFamily="50" charset="-127"/>
-                    <a:cs typeface="Pretendard Variable" pitchFamily="34" charset="-120"/>
-                  </a:rPr>
-                  <a:t>시작’이</a:t>
-                </a:r>
-                <a:r>
-                  <a:rPr lang="en-US" altLang="ko-KR" sz="1200" dirty="0">
-                    <a:solidFill>
-                      <a:srgbClr val="1A1A1A"/>
-                    </a:solidFill>
-                    <a:latin typeface="맑은 고딕" panose="020B0503020000020004" pitchFamily="50" charset="-127"/>
-                    <a:ea typeface="맑은 고딕" panose="020B0503020000020004" pitchFamily="50" charset="-127"/>
-                    <a:cs typeface="Pretendard Variable" pitchFamily="34" charset="-120"/>
-                  </a:rPr>
-                  <a:t> </a:t>
-                </a:r>
-                <a:r>
-                  <a:rPr lang="en-US" altLang="ko-KR" sz="1200" dirty="0" err="1">
-                    <a:solidFill>
-                      <a:srgbClr val="1A1A1A"/>
-                    </a:solidFill>
-                    <a:latin typeface="맑은 고딕" panose="020B0503020000020004" pitchFamily="50" charset="-127"/>
-                    <a:ea typeface="맑은 고딕" panose="020B0503020000020004" pitchFamily="50" charset="-127"/>
-                    <a:cs typeface="Pretendard Variable" pitchFamily="34" charset="-120"/>
-                  </a:rPr>
-                  <a:t>가능하고</a:t>
-                </a:r>
-                <a:r>
-                  <a:rPr lang="en-US" altLang="ko-KR" sz="1200" dirty="0">
-                    <a:solidFill>
-                      <a:srgbClr val="1A1A1A"/>
-                    </a:solidFill>
-                    <a:latin typeface="맑은 고딕" panose="020B0503020000020004" pitchFamily="50" charset="-127"/>
-                    <a:ea typeface="맑은 고딕" panose="020B0503020000020004" pitchFamily="50" charset="-127"/>
-                    <a:cs typeface="Pretendard Variable" pitchFamily="34" charset="-120"/>
-                  </a:rPr>
-                  <a:t> </a:t>
-                </a:r>
-                <a:r>
-                  <a:rPr lang="en-US" altLang="ko-KR" sz="1200" dirty="0" err="1">
-                    <a:solidFill>
-                      <a:srgbClr val="1A1A1A"/>
-                    </a:solidFill>
-                    <a:latin typeface="맑은 고딕" panose="020B0503020000020004" pitchFamily="50" charset="-127"/>
-                    <a:ea typeface="맑은 고딕" panose="020B0503020000020004" pitchFamily="50" charset="-127"/>
-                    <a:cs typeface="Pretendard Variable" pitchFamily="34" charset="-120"/>
-                  </a:rPr>
-                  <a:t>효과를</a:t>
-                </a:r>
-                <a:r>
-                  <a:rPr lang="en-US" altLang="ko-KR" sz="1200" dirty="0">
-                    <a:solidFill>
-                      <a:srgbClr val="1A1A1A"/>
-                    </a:solidFill>
-                    <a:latin typeface="맑은 고딕" panose="020B0503020000020004" pitchFamily="50" charset="-127"/>
-                    <a:ea typeface="맑은 고딕" panose="020B0503020000020004" pitchFamily="50" charset="-127"/>
-                    <a:cs typeface="Pretendard Variable" pitchFamily="34" charset="-120"/>
-                  </a:rPr>
-                  <a:t> </a:t>
-                </a:r>
-                <a:r>
-                  <a:rPr lang="en-US" altLang="ko-KR" sz="1200" dirty="0" err="1">
-                    <a:solidFill>
-                      <a:srgbClr val="1A1A1A"/>
-                    </a:solidFill>
-                    <a:latin typeface="맑은 고딕" panose="020B0503020000020004" pitchFamily="50" charset="-127"/>
-                    <a:ea typeface="맑은 고딕" panose="020B0503020000020004" pitchFamily="50" charset="-127"/>
-                    <a:cs typeface="Pretendard Variable" pitchFamily="34" charset="-120"/>
-                  </a:rPr>
-                  <a:t>측정할</a:t>
-                </a:r>
-                <a:r>
-                  <a:rPr lang="en-US" altLang="ko-KR" sz="1200" dirty="0">
-                    <a:solidFill>
-                      <a:srgbClr val="1A1A1A"/>
-                    </a:solidFill>
-                    <a:latin typeface="맑은 고딕" panose="020B0503020000020004" pitchFamily="50" charset="-127"/>
-                    <a:ea typeface="맑은 고딕" panose="020B0503020000020004" pitchFamily="50" charset="-127"/>
-                    <a:cs typeface="Pretendard Variable" pitchFamily="34" charset="-120"/>
-                  </a:rPr>
-                  <a:t> 수 </a:t>
-                </a:r>
-                <a:r>
-                  <a:rPr lang="en-US" altLang="ko-KR" sz="1200" dirty="0" err="1">
-                    <a:solidFill>
-                      <a:srgbClr val="1A1A1A"/>
-                    </a:solidFill>
-                    <a:latin typeface="맑은 고딕" panose="020B0503020000020004" pitchFamily="50" charset="-127"/>
-                    <a:ea typeface="맑은 고딕" panose="020B0503020000020004" pitchFamily="50" charset="-127"/>
-                    <a:cs typeface="Pretendard Variable" pitchFamily="34" charset="-120"/>
-                  </a:rPr>
-                  <a:t>있습니다</a:t>
-                </a:r>
-                <a:r>
-                  <a:rPr lang="en-US" altLang="ko-KR" sz="1200" dirty="0">
-                    <a:solidFill>
-                      <a:srgbClr val="1A1A1A"/>
-                    </a:solidFill>
-                    <a:latin typeface="맑은 고딕" panose="020B0503020000020004" pitchFamily="50" charset="-127"/>
-                    <a:ea typeface="맑은 고딕" panose="020B0503020000020004" pitchFamily="50" charset="-127"/>
-                    <a:cs typeface="Pretendard Variable" pitchFamily="34" charset="-120"/>
-                  </a:rPr>
-                  <a:t>.</a:t>
-                </a:r>
-                <a:endParaRPr lang="en-US" altLang="ko-KR" sz="1200" dirty="0">
-                  <a:latin typeface="맑은 고딕" panose="020B0503020000020004" pitchFamily="50" charset="-127"/>
-                  <a:ea typeface="맑은 고딕" panose="020B0503020000020004" pitchFamily="50" charset="-127"/>
+                <a:endParaRPr lang="en-US" altLang="ko-KR" sz="1200">
+                  <a:latin typeface="맑은 고딕"/>
+                  <a:ea typeface="맑은 고딕"/>
                 </a:endParaRPr>
               </a:p>
             </p:txBody>
@@ -2742,13 +1740,7 @@
         </p:grpSp>
         <p:sp>
           <p:nvSpPr>
-            <p:cNvPr id="132" name="직사각형 131">
-              <a:extLst>
-                <a:ext uri="{FF2B5EF4-FFF2-40B4-BE49-F238E27FC236}">
-                  <a16:creationId xmlns:a16="http://schemas.microsoft.com/office/drawing/2014/main" id="{C024829E-470C-C944-8F00-2BAB23ED860F}"/>
-                </a:ext>
-              </a:extLst>
-            </p:cNvPr>
+            <p:cNvPr id="132" name="직사각형 131"/>
             <p:cNvSpPr/>
             <p:nvPr/>
           </p:nvSpPr>
@@ -2786,10 +1778,10 @@
             </a:fontRef>
           </p:style>
           <p:txBody>
-            <a:bodyPr rtlCol="0" anchor="ctr"/>
+            <a:bodyPr anchor="ctr"/>
             <a:lstStyle/>
             <a:p>
-              <a:pPr marL="0" marR="0" lvl="0" indent="0" algn="l" defTabSz="914400" rtl="0" eaLnBrk="1" fontAlgn="auto" latinLnBrk="1" hangingPunct="1">
+              <a:pPr marL="0" marR="0" lvl="0" indent="0" algn="l" defTabSz="914400" rtl="0" eaLnBrk="1" latinLnBrk="1" hangingPunct="1">
                 <a:lnSpc>
                   <a:spcPct val="100000"/>
                 </a:lnSpc>
@@ -2800,31 +1792,23 @@
                   <a:spcPts val="0"/>
                 </a:spcAft>
                 <a:buClrTx/>
-                <a:buSzTx/>
                 <a:buFontTx/>
                 <a:buNone/>
-                <a:tabLst/>
                 <a:defRPr/>
               </a:pPr>
-              <a:endParaRPr lang="ko-KR" altLang="en-US" sz="1100" dirty="0">
+              <a:endParaRPr lang="ko-KR" altLang="en-US" sz="1100">
                 <a:solidFill>
                   <a:schemeClr val="tx1"/>
                 </a:solidFill>
-                <a:latin typeface="맑은 고딕" panose="020B0503020000020004" pitchFamily="50" charset="-127"/>
-                <a:ea typeface="맑은 고딕" panose="020B0503020000020004" pitchFamily="50" charset="-127"/>
+                <a:latin typeface="맑은 고딕"/>
+                <a:ea typeface="맑은 고딕"/>
               </a:endParaRPr>
             </a:p>
           </p:txBody>
         </p:sp>
         <p:sp>
           <p:nvSpPr>
-            <p:cNvPr id="133" name="Text 17">
-              <a:extLst>
-                <a:ext uri="{FF2B5EF4-FFF2-40B4-BE49-F238E27FC236}">
-                  <a16:creationId xmlns:a16="http://schemas.microsoft.com/office/drawing/2014/main" id="{86C3863E-1CD4-C5F9-779F-9FF4C2EF0D7C}"/>
-                </a:ext>
-              </a:extLst>
-            </p:cNvPr>
+            <p:cNvPr id="133" name="Text 17"/>
             <p:cNvSpPr txBox="1"/>
             <p:nvPr/>
           </p:nvSpPr>
@@ -2840,287 +1824,288 @@
             <a:ln/>
           </p:spPr>
           <p:txBody>
-            <a:bodyPr wrap="none" lIns="0" tIns="0" rIns="0" bIns="0" rtlCol="0" anchor="ctr"/>
+            <a:bodyPr wrap="none" lIns="0" tIns="0" rIns="0" bIns="0" anchor="ctr"/>
             <a:lstStyle/>
             <a:p>
               <a:pPr marL="0" indent="0" algn="l">
                 <a:buNone/>
+                <a:defRPr/>
               </a:pPr>
               <a:r>
-                <a:rPr lang="ko-KR" altLang="en-US" sz="1000" dirty="0">
+                <a:rPr lang="ko-KR" altLang="en-US" sz="1000">
                   <a:solidFill>
                     <a:schemeClr val="tx1">
                       <a:lumMod val="50000"/>
                       <a:lumOff val="50000"/>
                     </a:schemeClr>
                   </a:solidFill>
-                  <a:latin typeface="맑은 고딕" panose="020B0503020000020004" pitchFamily="50" charset="-127"/>
-                  <a:ea typeface="맑은 고딕" panose="020B0503020000020004" pitchFamily="50" charset="-127"/>
-                  <a:cs typeface="Pretendard Variable" pitchFamily="34" charset="-120"/>
+                  <a:latin typeface="맑은 고딕"/>
+                  <a:ea typeface="맑은 고딕"/>
+                  <a:cs typeface="Pretendard Variable"/>
                 </a:rPr>
                 <a:t>예시 </a:t>
               </a:r>
               <a:r>
-                <a:rPr lang="en-US" altLang="ko-KR" sz="1000" dirty="0">
+                <a:rPr lang="en-US" altLang="ko-KR" sz="1000">
                   <a:solidFill>
                     <a:schemeClr val="tx1">
                       <a:lumMod val="50000"/>
                       <a:lumOff val="50000"/>
                     </a:schemeClr>
                   </a:solidFill>
-                  <a:latin typeface="맑은 고딕" panose="020B0503020000020004" pitchFamily="50" charset="-127"/>
-                  <a:ea typeface="맑은 고딕" panose="020B0503020000020004" pitchFamily="50" charset="-127"/>
-                  <a:cs typeface="Pretendard Variable" pitchFamily="34" charset="-120"/>
+                  <a:latin typeface="맑은 고딕"/>
+                  <a:ea typeface="맑은 고딕"/>
+                  <a:cs typeface="Pretendard Variable"/>
                 </a:rPr>
                 <a:t>: </a:t>
               </a:r>
               <a:r>
-                <a:rPr lang="ko-KR" altLang="en-US" sz="1000" dirty="0">
+                <a:rPr lang="ko-KR" altLang="en-US" sz="1000">
                   <a:solidFill>
                     <a:schemeClr val="tx1">
                       <a:lumMod val="50000"/>
                       <a:lumOff val="50000"/>
                     </a:schemeClr>
                   </a:solidFill>
-                  <a:latin typeface="맑은 고딕" panose="020B0503020000020004" pitchFamily="50" charset="-127"/>
-                  <a:ea typeface="맑은 고딕" panose="020B0503020000020004" pitchFamily="50" charset="-127"/>
-                  <a:cs typeface="Pretendard Variable" pitchFamily="34" charset="-120"/>
+                  <a:latin typeface="맑은 고딕"/>
+                  <a:ea typeface="맑은 고딕"/>
+                  <a:cs typeface="Pretendard Variable"/>
                 </a:rPr>
                 <a:t>작성 항목</a:t>
               </a:r>
               <a:r>
-                <a:rPr lang="en-US" altLang="ko-KR" sz="1000" dirty="0">
+                <a:rPr lang="en-US" altLang="ko-KR" sz="1000">
                   <a:solidFill>
                     <a:schemeClr val="tx1">
                       <a:lumMod val="50000"/>
                       <a:lumOff val="50000"/>
                     </a:schemeClr>
                   </a:solidFill>
-                  <a:latin typeface="맑은 고딕" panose="020B0503020000020004" pitchFamily="50" charset="-127"/>
-                  <a:ea typeface="맑은 고딕" panose="020B0503020000020004" pitchFamily="50" charset="-127"/>
-                  <a:cs typeface="Pretendard Variable" pitchFamily="34" charset="-120"/>
+                  <a:latin typeface="맑은 고딕"/>
+                  <a:ea typeface="맑은 고딕"/>
+                  <a:cs typeface="Pretendard Variable"/>
                 </a:rPr>
                 <a:t>: </a:t>
               </a:r>
               <a:r>
-                <a:rPr lang="ko-KR" altLang="en-US" sz="1000" dirty="0">
+                <a:rPr lang="ko-KR" altLang="en-US" sz="1000">
                   <a:solidFill>
                     <a:schemeClr val="tx1">
                       <a:lumMod val="50000"/>
                       <a:lumOff val="50000"/>
                     </a:schemeClr>
                   </a:solidFill>
-                  <a:latin typeface="맑은 고딕" panose="020B0503020000020004" pitchFamily="50" charset="-127"/>
-                  <a:ea typeface="맑은 고딕" panose="020B0503020000020004" pitchFamily="50" charset="-127"/>
-                  <a:cs typeface="Pretendard Variable" pitchFamily="34" charset="-120"/>
+                  <a:latin typeface="맑은 고딕"/>
+                  <a:ea typeface="맑은 고딕"/>
+                  <a:cs typeface="Pretendard Variable"/>
                 </a:rPr>
                 <a:t>결과물 </a:t>
               </a:r>
               <a:r>
-                <a:rPr lang="en-US" altLang="ko-KR" sz="1000" dirty="0">
+                <a:rPr lang="en-US" altLang="ko-KR" sz="1000">
                   <a:solidFill>
                     <a:schemeClr val="tx1">
                       <a:lumMod val="50000"/>
                       <a:lumOff val="50000"/>
                     </a:schemeClr>
                   </a:solidFill>
-                  <a:latin typeface="맑은 고딕" panose="020B0503020000020004" pitchFamily="50" charset="-127"/>
-                  <a:ea typeface="맑은 고딕" panose="020B0503020000020004" pitchFamily="50" charset="-127"/>
-                  <a:cs typeface="Pretendard Variable" pitchFamily="34" charset="-120"/>
+                  <a:latin typeface="맑은 고딕"/>
+                  <a:ea typeface="맑은 고딕"/>
+                  <a:cs typeface="Pretendard Variable"/>
                 </a:rPr>
                 <a:t>1</a:t>
               </a:r>
               <a:r>
-                <a:rPr lang="ko-KR" altLang="en-US" sz="1000" dirty="0">
+                <a:rPr lang="ko-KR" altLang="en-US" sz="1000">
                   <a:solidFill>
                     <a:schemeClr val="tx1">
                       <a:lumMod val="50000"/>
                       <a:lumOff val="50000"/>
                     </a:schemeClr>
                   </a:solidFill>
-                  <a:latin typeface="맑은 고딕" panose="020B0503020000020004" pitchFamily="50" charset="-127"/>
-                  <a:ea typeface="맑은 고딕" panose="020B0503020000020004" pitchFamily="50" charset="-127"/>
-                  <a:cs typeface="Pretendard Variable" pitchFamily="34" charset="-120"/>
+                  <a:latin typeface="맑은 고딕"/>
+                  <a:ea typeface="맑은 고딕"/>
+                  <a:cs typeface="Pretendard Variable"/>
                 </a:rPr>
                 <a:t>종 </a:t>
               </a:r>
               <a:r>
-                <a:rPr lang="en-US" altLang="ko-KR" sz="1000" dirty="0">
+                <a:rPr lang="en-US" altLang="ko-KR" sz="1000">
                   <a:solidFill>
                     <a:schemeClr val="tx1">
                       <a:lumMod val="50000"/>
                       <a:lumOff val="50000"/>
                     </a:schemeClr>
                   </a:solidFill>
-                  <a:latin typeface="맑은 고딕" panose="020B0503020000020004" pitchFamily="50" charset="-127"/>
-                  <a:ea typeface="맑은 고딕" panose="020B0503020000020004" pitchFamily="50" charset="-127"/>
-                  <a:cs typeface="Pretendard Variable" pitchFamily="34" charset="-120"/>
+                  <a:latin typeface="맑은 고딕"/>
+                  <a:ea typeface="맑은 고딕"/>
+                  <a:cs typeface="Pretendard Variable"/>
                 </a:rPr>
                 <a:t>(</a:t>
               </a:r>
               <a:r>
-                <a:rPr lang="ko-KR" altLang="en-US" sz="1000" dirty="0">
+                <a:rPr lang="ko-KR" altLang="en-US" sz="1000">
                   <a:solidFill>
                     <a:schemeClr val="tx1">
                       <a:lumMod val="50000"/>
                       <a:lumOff val="50000"/>
                     </a:schemeClr>
                   </a:solidFill>
-                  <a:latin typeface="맑은 고딕" panose="020B0503020000020004" pitchFamily="50" charset="-127"/>
-                  <a:ea typeface="맑은 고딕" panose="020B0503020000020004" pitchFamily="50" charset="-127"/>
-                  <a:cs typeface="Pretendard Variable" pitchFamily="34" charset="-120"/>
+                  <a:latin typeface="맑은 고딕"/>
+                  <a:ea typeface="맑은 고딕"/>
+                  <a:cs typeface="Pretendard Variable"/>
                 </a:rPr>
                 <a:t>회의록</a:t>
               </a:r>
               <a:r>
-                <a:rPr lang="en-US" altLang="ko-KR" sz="1000" dirty="0">
+                <a:rPr lang="en-US" altLang="ko-KR" sz="1000">
                   <a:solidFill>
                     <a:schemeClr val="tx1">
                       <a:lumMod val="50000"/>
                       <a:lumOff val="50000"/>
                     </a:schemeClr>
                   </a:solidFill>
-                  <a:latin typeface="맑은 고딕" panose="020B0503020000020004" pitchFamily="50" charset="-127"/>
-                  <a:ea typeface="맑은 고딕" panose="020B0503020000020004" pitchFamily="50" charset="-127"/>
-                  <a:cs typeface="Pretendard Variable" pitchFamily="34" charset="-120"/>
+                  <a:latin typeface="맑은 고딕"/>
+                  <a:ea typeface="맑은 고딕"/>
+                  <a:cs typeface="Pretendard Variable"/>
                 </a:rPr>
                 <a:t>·</a:t>
               </a:r>
               <a:r>
-                <a:rPr lang="ko-KR" altLang="en-US" sz="1000" dirty="0">
+                <a:rPr lang="ko-KR" altLang="en-US" sz="1000">
                   <a:solidFill>
                     <a:schemeClr val="tx1">
                       <a:lumMod val="50000"/>
                       <a:lumOff val="50000"/>
                     </a:schemeClr>
                   </a:solidFill>
-                  <a:latin typeface="맑은 고딕" panose="020B0503020000020004" pitchFamily="50" charset="-127"/>
-                  <a:ea typeface="맑은 고딕" panose="020B0503020000020004" pitchFamily="50" charset="-127"/>
-                  <a:cs typeface="Pretendard Variable" pitchFamily="34" charset="-120"/>
+                  <a:latin typeface="맑은 고딕"/>
+                  <a:ea typeface="맑은 고딕"/>
+                  <a:cs typeface="Pretendard Variable"/>
                 </a:rPr>
                 <a:t>대시보드</a:t>
               </a:r>
               <a:r>
-                <a:rPr lang="en-US" altLang="ko-KR" sz="1000" dirty="0">
+                <a:rPr lang="en-US" altLang="ko-KR" sz="1000">
                   <a:solidFill>
                     <a:schemeClr val="tx1">
                       <a:lumMod val="50000"/>
                       <a:lumOff val="50000"/>
                     </a:schemeClr>
                   </a:solidFill>
-                  <a:latin typeface="맑은 고딕" panose="020B0503020000020004" pitchFamily="50" charset="-127"/>
-                  <a:ea typeface="맑은 고딕" panose="020B0503020000020004" pitchFamily="50" charset="-127"/>
-                  <a:cs typeface="Pretendard Variable" pitchFamily="34" charset="-120"/>
+                  <a:latin typeface="맑은 고딕"/>
+                  <a:ea typeface="맑은 고딕"/>
+                  <a:cs typeface="Pretendard Variable"/>
                 </a:rPr>
                 <a:t>·</a:t>
               </a:r>
               <a:r>
-                <a:rPr lang="ko-KR" altLang="en-US" sz="1000" dirty="0">
+                <a:rPr lang="ko-KR" altLang="en-US" sz="1000">
                   <a:solidFill>
                     <a:schemeClr val="tx1">
                       <a:lumMod val="50000"/>
                       <a:lumOff val="50000"/>
                     </a:schemeClr>
                   </a:solidFill>
-                  <a:latin typeface="맑은 고딕" panose="020B0503020000020004" pitchFamily="50" charset="-127"/>
-                  <a:ea typeface="맑은 고딕" panose="020B0503020000020004" pitchFamily="50" charset="-127"/>
-                  <a:cs typeface="Pretendard Variable" pitchFamily="34" charset="-120"/>
+                  <a:latin typeface="맑은 고딕"/>
+                  <a:ea typeface="맑은 고딕"/>
+                  <a:cs typeface="Pretendard Variable"/>
                 </a:rPr>
                 <a:t>보고서</a:t>
               </a:r>
               <a:r>
-                <a:rPr lang="en-US" altLang="ko-KR" sz="1000" dirty="0">
+                <a:rPr lang="en-US" altLang="ko-KR" sz="1000">
                   <a:solidFill>
                     <a:schemeClr val="tx1">
                       <a:lumMod val="50000"/>
                       <a:lumOff val="50000"/>
                     </a:schemeClr>
                   </a:solidFill>
-                  <a:latin typeface="맑은 고딕" panose="020B0503020000020004" pitchFamily="50" charset="-127"/>
-                  <a:ea typeface="맑은 고딕" panose="020B0503020000020004" pitchFamily="50" charset="-127"/>
-                  <a:cs typeface="Pretendard Variable" pitchFamily="34" charset="-120"/>
+                  <a:latin typeface="맑은 고딕"/>
+                  <a:ea typeface="맑은 고딕"/>
+                  <a:cs typeface="Pretendard Variable"/>
                 </a:rPr>
                 <a:t>·</a:t>
               </a:r>
               <a:r>
-                <a:rPr lang="ko-KR" altLang="en-US" sz="1000" dirty="0">
+                <a:rPr lang="ko-KR" altLang="en-US" sz="1000">
                   <a:solidFill>
                     <a:schemeClr val="tx1">
                       <a:lumMod val="50000"/>
                       <a:lumOff val="50000"/>
                     </a:schemeClr>
                   </a:solidFill>
-                  <a:latin typeface="맑은 고딕" panose="020B0503020000020004" pitchFamily="50" charset="-127"/>
-                  <a:ea typeface="맑은 고딕" panose="020B0503020000020004" pitchFamily="50" charset="-127"/>
-                  <a:cs typeface="Pretendard Variable" pitchFamily="34" charset="-120"/>
+                  <a:latin typeface="맑은 고딕"/>
+                  <a:ea typeface="맑은 고딕"/>
+                  <a:cs typeface="Pretendard Variable"/>
                 </a:rPr>
                 <a:t>메일 초안 등</a:t>
               </a:r>
               <a:r>
-                <a:rPr lang="en-US" altLang="ko-KR" sz="1000" dirty="0">
+                <a:rPr lang="en-US" altLang="ko-KR" sz="1000">
                   <a:solidFill>
                     <a:schemeClr val="tx1">
                       <a:lumMod val="50000"/>
                       <a:lumOff val="50000"/>
                     </a:schemeClr>
                   </a:solidFill>
-                  <a:latin typeface="맑은 고딕" panose="020B0503020000020004" pitchFamily="50" charset="-127"/>
-                  <a:ea typeface="맑은 고딕" panose="020B0503020000020004" pitchFamily="50" charset="-127"/>
-                  <a:cs typeface="Pretendard Variable" pitchFamily="34" charset="-120"/>
+                  <a:latin typeface="맑은 고딕"/>
+                  <a:ea typeface="맑은 고딕"/>
+                  <a:cs typeface="Pretendard Variable"/>
                 </a:rPr>
                 <a:t>) + </a:t>
               </a:r>
               <a:r>
-                <a:rPr lang="ko-KR" altLang="en-US" sz="1000" dirty="0">
+                <a:rPr lang="ko-KR" altLang="en-US" sz="1000">
                   <a:solidFill>
                     <a:schemeClr val="tx1">
                       <a:lumMod val="50000"/>
                       <a:lumOff val="50000"/>
                     </a:schemeClr>
                   </a:solidFill>
-                  <a:latin typeface="맑은 고딕" panose="020B0503020000020004" pitchFamily="50" charset="-127"/>
-                  <a:ea typeface="맑은 고딕" panose="020B0503020000020004" pitchFamily="50" charset="-127"/>
-                  <a:cs typeface="Pretendard Variable" pitchFamily="34" charset="-120"/>
+                  <a:latin typeface="맑은 고딕"/>
+                  <a:ea typeface="맑은 고딕"/>
+                  <a:cs typeface="Pretendard Variable"/>
                 </a:rPr>
                 <a:t>시간 절감 </a:t>
               </a:r>
               <a:r>
-                <a:rPr lang="en-US" altLang="ko-KR" sz="1000" dirty="0">
+                <a:rPr lang="en-US" altLang="ko-KR" sz="1000">
                   <a:solidFill>
                     <a:schemeClr val="tx1">
                       <a:lumMod val="50000"/>
                       <a:lumOff val="50000"/>
                     </a:schemeClr>
                   </a:solidFill>
-                  <a:latin typeface="맑은 고딕" panose="020B0503020000020004" pitchFamily="50" charset="-127"/>
-                  <a:ea typeface="맑은 고딕" panose="020B0503020000020004" pitchFamily="50" charset="-127"/>
-                  <a:cs typeface="Pretendard Variable" pitchFamily="34" charset="-120"/>
+                  <a:latin typeface="맑은 고딕"/>
+                  <a:ea typeface="맑은 고딕"/>
+                  <a:cs typeface="Pretendard Variable"/>
                 </a:rPr>
                 <a:t>N</a:t>
               </a:r>
               <a:r>
-                <a:rPr lang="ko-KR" altLang="en-US" sz="1000" dirty="0">
+                <a:rPr lang="ko-KR" altLang="en-US" sz="1000">
                   <a:solidFill>
                     <a:schemeClr val="tx1">
                       <a:lumMod val="50000"/>
                       <a:lumOff val="50000"/>
                     </a:schemeClr>
                   </a:solidFill>
-                  <a:latin typeface="맑은 고딕" panose="020B0503020000020004" pitchFamily="50" charset="-127"/>
-                  <a:ea typeface="맑은 고딕" panose="020B0503020000020004" pitchFamily="50" charset="-127"/>
-                  <a:cs typeface="Pretendard Variable" pitchFamily="34" charset="-120"/>
+                  <a:latin typeface="맑은 고딕"/>
+                  <a:ea typeface="맑은 고딕"/>
+                  <a:cs typeface="Pretendard Variable"/>
                 </a:rPr>
                 <a:t>분</a:t>
               </a:r>
-              <a:endParaRPr lang="en-US" sz="1000" dirty="0">
+              <a:endParaRPr lang="en-US" sz="1000">
                 <a:solidFill>
                   <a:schemeClr val="tx1">
                     <a:lumMod val="50000"/>
                     <a:lumOff val="50000"/>
                   </a:schemeClr>
                 </a:solidFill>
-                <a:latin typeface="맑은 고딕" panose="020B0503020000020004" pitchFamily="50" charset="-127"/>
-                <a:ea typeface="맑은 고딕" panose="020B0503020000020004" pitchFamily="50" charset="-127"/>
+                <a:latin typeface="맑은 고딕"/>
+                <a:ea typeface="맑은 고딕"/>
               </a:endParaRPr>
             </a:p>
           </p:txBody>
@@ -3128,13 +2113,7 @@
       </p:grpSp>
       <p:grpSp>
         <p:nvGrpSpPr>
-          <p:cNvPr id="134" name="그룹 133">
-            <a:extLst>
-              <a:ext uri="{FF2B5EF4-FFF2-40B4-BE49-F238E27FC236}">
-                <a16:creationId xmlns:a16="http://schemas.microsoft.com/office/drawing/2014/main" id="{382BBECE-29A6-53B5-7BDC-0156257788CC}"/>
-              </a:ext>
-            </a:extLst>
-          </p:cNvPr>
+          <p:cNvPr id="134" name="그룹 133"/>
           <p:cNvGrpSpPr/>
           <p:nvPr/>
         </p:nvGrpSpPr>
@@ -3164,26 +2143,27 @@
             <a:ln/>
           </p:spPr>
           <p:txBody>
-            <a:bodyPr wrap="none" lIns="0" tIns="0" rIns="0" bIns="0" rtlCol="0" anchor="ctr"/>
+            <a:bodyPr wrap="none" lIns="0" tIns="0" rIns="0" bIns="0" anchor="ctr"/>
             <a:lstStyle/>
             <a:p>
               <a:pPr marL="0" indent="0" algn="l">
                 <a:buNone/>
+                <a:defRPr/>
               </a:pPr>
               <a:r>
-                <a:rPr lang="en-US" sz="2400" b="1" kern="0" spc="-84" dirty="0">
+                <a:rPr lang="en-US" sz="2400" b="1" kern="0" spc="-84">
                   <a:solidFill>
                     <a:srgbClr val="164194"/>
                   </a:solidFill>
-                  <a:latin typeface="맑은 고딕" panose="020B0503020000020004" pitchFamily="50" charset="-127"/>
-                  <a:ea typeface="맑은 고딕" panose="020B0503020000020004" pitchFamily="50" charset="-127"/>
-                  <a:cs typeface="Pretendard Variable" pitchFamily="34" charset="-120"/>
+                  <a:latin typeface="맑은 고딕"/>
+                  <a:ea typeface="맑은 고딕"/>
+                  <a:cs typeface="Pretendard Variable"/>
                 </a:rPr>
                 <a:t>01</a:t>
               </a:r>
-              <a:endParaRPr lang="en-US" sz="2400" dirty="0">
-                <a:latin typeface="맑은 고딕" panose="020B0503020000020004" pitchFamily="50" charset="-127"/>
-                <a:ea typeface="맑은 고딕" panose="020B0503020000020004" pitchFamily="50" charset="-127"/>
+              <a:endParaRPr lang="en-US" sz="2400">
+                <a:latin typeface="맑은 고딕"/>
+                <a:ea typeface="맑은 고딕"/>
               </a:endParaRPr>
             </a:p>
           </p:txBody>
@@ -3206,50 +2186,45 @@
             <a:ln/>
           </p:spPr>
           <p:txBody>
-            <a:bodyPr wrap="none" lIns="0" tIns="0" rIns="0" bIns="0" rtlCol="0" anchor="ctr"/>
+            <a:bodyPr wrap="none" lIns="0" tIns="0" rIns="0" bIns="0" anchor="ctr"/>
             <a:lstStyle/>
             <a:p>
               <a:pPr marL="0" indent="0" algn="l">
                 <a:buNone/>
+                <a:defRPr/>
               </a:pPr>
               <a:r>
-                <a:rPr lang="en-US" sz="1400" b="1" dirty="0">
+                <a:rPr lang="en-US" sz="1400" b="1">
                   <a:solidFill>
                     <a:srgbClr val="1A1A1A"/>
                   </a:solidFill>
-                  <a:latin typeface="맑은 고딕" panose="020B0503020000020004" pitchFamily="50" charset="-127"/>
-                  <a:ea typeface="맑은 고딕" panose="020B0503020000020004" pitchFamily="50" charset="-127"/>
-                  <a:cs typeface="Pretendard Variable" pitchFamily="34" charset="-120"/>
+                  <a:latin typeface="맑은 고딕"/>
+                  <a:ea typeface="맑은 고딕"/>
+                  <a:cs typeface="Pretendard Variable"/>
                 </a:rPr>
                 <a:t>문제 정의 </a:t>
               </a:r>
               <a:r>
-                <a:rPr lang="en-US" sz="1400" b="1" dirty="0">
+                <a:rPr lang="en-US" sz="1400" b="1">
                   <a:solidFill>
                     <a:srgbClr val="9AA6B8"/>
                   </a:solidFill>
-                  <a:latin typeface="맑은 고딕" panose="020B0503020000020004" pitchFamily="50" charset="-127"/>
-                  <a:ea typeface="맑은 고딕" panose="020B0503020000020004" pitchFamily="50" charset="-127"/>
-                  <a:cs typeface="Pretendard Variable" pitchFamily="34" charset="-120"/>
+                  <a:latin typeface="맑은 고딕"/>
+                  <a:ea typeface="맑은 고딕"/>
+                  <a:cs typeface="Pretendard Variable"/>
                 </a:rPr>
                 <a:t>(1~2줄)</a:t>
               </a:r>
-              <a:endParaRPr lang="en-US" sz="1400" dirty="0">
-                <a:latin typeface="맑은 고딕" panose="020B0503020000020004" pitchFamily="50" charset="-127"/>
-                <a:ea typeface="맑은 고딕" panose="020B0503020000020004" pitchFamily="50" charset="-127"/>
+              <a:endParaRPr lang="en-US" sz="1400">
+                <a:latin typeface="맑은 고딕"/>
+                <a:ea typeface="맑은 고딕"/>
               </a:endParaRPr>
             </a:p>
           </p:txBody>
         </p:sp>
         <p:grpSp>
           <p:nvGrpSpPr>
-            <p:cNvPr id="98" name="그룹 97">
-              <a:extLst>
-                <a:ext uri="{FF2B5EF4-FFF2-40B4-BE49-F238E27FC236}">
-                  <a16:creationId xmlns:a16="http://schemas.microsoft.com/office/drawing/2014/main" id="{AD2FB69B-7F0B-9C1E-16C6-C06DDCC20848}"/>
-                </a:ext>
-              </a:extLst>
-            </p:cNvPr>
+            <p:cNvPr id="98" name="그룹 97"/>
             <p:cNvGrpSpPr/>
             <p:nvPr/>
           </p:nvGrpSpPr>
@@ -3269,10 +2244,12 @@
               </p:cNvPicPr>
               <p:nvPr/>
             </p:nvPicPr>
-            <p:blipFill>
+            <p:blipFill rotWithShape="1">
               <a:blip r:embed="rId4"/>
-              <a:srcRect l="-26" r="-26"/>
-              <a:stretch/>
+              <a:srcRect l="-30" r="-30"/>
+              <a:stretch>
+                <a:fillRect/>
+              </a:stretch>
             </p:blipFill>
             <p:spPr>
               <a:xfrm>
@@ -3302,26 +2279,27 @@
               <a:ln/>
             </p:spPr>
             <p:txBody>
-              <a:bodyPr wrap="none" lIns="0" tIns="0" rIns="0" bIns="0" rtlCol="0" anchor="ctr"/>
+              <a:bodyPr wrap="none" lIns="0" tIns="0" rIns="0" bIns="0" anchor="ctr"/>
               <a:lstStyle/>
               <a:p>
                 <a:pPr marL="0" indent="0" algn="l">
                   <a:buNone/>
+                  <a:defRPr/>
                 </a:pPr>
                 <a:r>
-                  <a:rPr lang="en-US" sz="1400" b="1" kern="0" spc="142" dirty="0">
+                  <a:rPr lang="en-US" sz="1400" b="1" kern="0" spc="142">
                     <a:solidFill>
                       <a:srgbClr val="70AD47"/>
                     </a:solidFill>
-                    <a:latin typeface="맑은 고딕" panose="020B0503020000020004" pitchFamily="50" charset="-127"/>
-                    <a:ea typeface="맑은 고딕" panose="020B0503020000020004" pitchFamily="50" charset="-127"/>
-                    <a:cs typeface="Pretendard Variable" pitchFamily="34" charset="-120"/>
+                    <a:latin typeface="맑은 고딕"/>
+                    <a:ea typeface="맑은 고딕"/>
+                    <a:cs typeface="Pretendard Variable"/>
                   </a:rPr>
                   <a:t>왜 작성하는가?</a:t>
                 </a:r>
-                <a:endParaRPr lang="en-US" sz="1400" dirty="0">
-                  <a:latin typeface="맑은 고딕" panose="020B0503020000020004" pitchFamily="50" charset="-127"/>
-                  <a:ea typeface="맑은 고딕" panose="020B0503020000020004" pitchFamily="50" charset="-127"/>
+                <a:endParaRPr lang="en-US" sz="1400">
+                  <a:latin typeface="맑은 고딕"/>
+                  <a:ea typeface="맑은 고딕"/>
                 </a:endParaRPr>
               </a:p>
             </p:txBody>
@@ -3344,7 +2322,7 @@
               <a:ln/>
             </p:spPr>
             <p:txBody>
-              <a:bodyPr wrap="square" lIns="0" tIns="0" rIns="0" bIns="0" rtlCol="0" anchor="ctr"/>
+              <a:bodyPr wrap="square" lIns="0" tIns="0" rIns="0" bIns="0" anchor="ctr"/>
               <a:lstStyle/>
               <a:p>
                 <a:pPr marL="0" indent="0" algn="l">
@@ -3352,37 +2330,38 @@
                     <a:spcPts val="1238"/>
                   </a:lnSpc>
                   <a:buNone/>
+                  <a:defRPr/>
                 </a:pPr>
                 <a:r>
-                  <a:rPr lang="en-US" sz="1200" dirty="0">
+                  <a:rPr lang="en-US" sz="1200">
                     <a:solidFill>
                       <a:srgbClr val="1A1A1A"/>
                     </a:solidFill>
-                    <a:latin typeface="맑은 고딕" panose="020B0503020000020004" pitchFamily="50" charset="-127"/>
-                    <a:ea typeface="맑은 고딕" panose="020B0503020000020004" pitchFamily="50" charset="-127"/>
-                    <a:cs typeface="Pretendard Variable" pitchFamily="34" charset="-120"/>
+                    <a:latin typeface="맑은 고딕"/>
+                    <a:ea typeface="맑은 고딕"/>
+                    <a:cs typeface="Pretendard Variable"/>
                   </a:rPr>
                   <a:t>문제가 명확해야 </a:t>
                 </a:r>
                 <a:r>
-                  <a:rPr lang="en-US" sz="1200" b="1" dirty="0">
+                  <a:rPr lang="en-US" sz="1200" b="1">
                     <a:solidFill>
                       <a:srgbClr val="70AD47"/>
                     </a:solidFill>
-                    <a:latin typeface="맑은 고딕" panose="020B0503020000020004" pitchFamily="50" charset="-127"/>
-                    <a:ea typeface="맑은 고딕" panose="020B0503020000020004" pitchFamily="50" charset="-127"/>
-                    <a:cs typeface="Pretendard Variable" pitchFamily="34" charset="-120"/>
+                    <a:latin typeface="맑은 고딕"/>
+                    <a:ea typeface="맑은 고딕"/>
+                    <a:cs typeface="Pretendard Variable"/>
                   </a:rPr>
                   <a:t>AI 적용 지점</a:t>
                 </a:r>
                 <a:r>
-                  <a:rPr lang="en-US" sz="1200" dirty="0">
+                  <a:rPr lang="en-US" sz="1200">
                     <a:solidFill>
                       <a:srgbClr val="1A1A1A"/>
                     </a:solidFill>
-                    <a:latin typeface="맑은 고딕" panose="020B0503020000020004" pitchFamily="50" charset="-127"/>
-                    <a:ea typeface="맑은 고딕" panose="020B0503020000020004" pitchFamily="50" charset="-127"/>
-                    <a:cs typeface="Pretendard Variable" pitchFamily="34" charset="-120"/>
+                    <a:latin typeface="맑은 고딕"/>
+                    <a:ea typeface="맑은 고딕"/>
+                    <a:cs typeface="Pretendard Variable"/>
                   </a:rPr>
                   <a:t>이 보입니다. </a:t>
                 </a:r>
@@ -3393,54 +2372,44 @@
                     <a:spcPts val="1238"/>
                   </a:lnSpc>
                   <a:buNone/>
+                  <a:defRPr/>
                 </a:pPr>
                 <a:r>
-                  <a:rPr lang="en-US" sz="1200" dirty="0" err="1">
+                  <a:rPr lang="en-US" sz="1200">
                     <a:solidFill>
                       <a:srgbClr val="1A1A1A"/>
                     </a:solidFill>
-                    <a:latin typeface="맑은 고딕" panose="020B0503020000020004" pitchFamily="50" charset="-127"/>
-                    <a:ea typeface="맑은 고딕" panose="020B0503020000020004" pitchFamily="50" charset="-127"/>
-                    <a:cs typeface="Pretendard Variable" pitchFamily="34" charset="-120"/>
+                    <a:latin typeface="맑은 고딕"/>
+                    <a:ea typeface="맑은 고딕"/>
+                    <a:cs typeface="Pretendard Variable"/>
                   </a:rPr>
-                  <a:t>반복·수작업·시간</a:t>
+                  <a:t>반복·수작업·시간 소요 업무 </a:t>
                 </a:r>
                 <a:r>
-                  <a:rPr lang="en-US" sz="1200" dirty="0">
-                    <a:solidFill>
-                      <a:srgbClr val="1A1A1A"/>
-                    </a:solidFill>
-                    <a:latin typeface="맑은 고딕" panose="020B0503020000020004" pitchFamily="50" charset="-127"/>
-                    <a:ea typeface="맑은 고딕" panose="020B0503020000020004" pitchFamily="50" charset="-127"/>
-                    <a:cs typeface="Pretendard Variable" pitchFamily="34" charset="-120"/>
-                  </a:rPr>
-                  <a:t> 소요 업무 </a:t>
-                </a:r>
-                <a:r>
-                  <a:rPr lang="en-US" sz="1200" b="1" dirty="0">
+                  <a:rPr lang="en-US" sz="1200" b="1">
                     <a:solidFill>
                       <a:srgbClr val="FF0000"/>
                     </a:solidFill>
-                    <a:latin typeface="맑은 고딕" panose="020B0503020000020004" pitchFamily="50" charset="-127"/>
-                    <a:ea typeface="맑은 고딕" panose="020B0503020000020004" pitchFamily="50" charset="-127"/>
-                    <a:cs typeface="Pretendard Variable" pitchFamily="34" charset="-120"/>
+                    <a:latin typeface="맑은 고딕"/>
+                    <a:ea typeface="맑은 고딕"/>
+                    <a:cs typeface="Pretendard Variable"/>
                   </a:rPr>
                   <a:t>1개만</a:t>
                 </a:r>
                 <a:r>
-                  <a:rPr lang="en-US" sz="1200" dirty="0">
+                  <a:rPr lang="en-US" sz="1200">
                     <a:solidFill>
                       <a:srgbClr val="1A1A1A"/>
                     </a:solidFill>
-                    <a:latin typeface="맑은 고딕" panose="020B0503020000020004" pitchFamily="50" charset="-127"/>
-                    <a:ea typeface="맑은 고딕" panose="020B0503020000020004" pitchFamily="50" charset="-127"/>
-                    <a:cs typeface="Pretendard Variable" pitchFamily="34" charset="-120"/>
+                    <a:latin typeface="맑은 고딕"/>
+                    <a:ea typeface="맑은 고딕"/>
+                    <a:cs typeface="Pretendard Variable"/>
                   </a:rPr>
                   <a:t> 고르세요.</a:t>
                 </a:r>
-                <a:endParaRPr lang="en-US" sz="1200" dirty="0">
-                  <a:latin typeface="맑은 고딕" panose="020B0503020000020004" pitchFamily="50" charset="-127"/>
-                  <a:ea typeface="맑은 고딕" panose="020B0503020000020004" pitchFamily="50" charset="-127"/>
+                <a:endParaRPr lang="en-US" sz="1200">
+                  <a:latin typeface="맑은 고딕"/>
+                  <a:ea typeface="맑은 고딕"/>
                 </a:endParaRPr>
               </a:p>
             </p:txBody>
@@ -3448,13 +2417,7 @@
         </p:grpSp>
         <p:sp>
           <p:nvSpPr>
-            <p:cNvPr id="115" name="직사각형 114">
-              <a:extLst>
-                <a:ext uri="{FF2B5EF4-FFF2-40B4-BE49-F238E27FC236}">
-                  <a16:creationId xmlns:a16="http://schemas.microsoft.com/office/drawing/2014/main" id="{5448C189-BDB2-55D2-2B64-4E7198BE215F}"/>
-                </a:ext>
-              </a:extLst>
-            </p:cNvPr>
+            <p:cNvPr id="115" name="직사각형 114"/>
             <p:cNvSpPr/>
             <p:nvPr/>
           </p:nvSpPr>
@@ -3492,12 +2455,15 @@
             </a:fontRef>
           </p:style>
           <p:txBody>
-            <a:bodyPr rtlCol="0" anchor="ctr"/>
+            <a:bodyPr anchor="ctr"/>
             <a:lstStyle/>
             <a:p>
-              <a:endParaRPr lang="ko-KR" altLang="en-US" sz="1100" dirty="0">
-                <a:latin typeface="맑은 고딕" panose="020B0503020000020004" pitchFamily="50" charset="-127"/>
-                <a:ea typeface="맑은 고딕" panose="020B0503020000020004" pitchFamily="50" charset="-127"/>
+              <a:pPr lvl="0">
+                <a:defRPr/>
+              </a:pPr>
+              <a:endParaRPr lang="ko-KR" altLang="en-US" sz="1100">
+                <a:latin typeface="맑은 고딕"/>
+                <a:ea typeface="맑은 고딕"/>
               </a:endParaRPr>
             </a:p>
           </p:txBody>
@@ -3520,49 +2486,50 @@
             <a:ln/>
           </p:spPr>
           <p:txBody>
-            <a:bodyPr wrap="none" lIns="0" tIns="0" rIns="0" bIns="0" rtlCol="0" anchor="ctr"/>
+            <a:bodyPr wrap="none" lIns="0" tIns="0" rIns="0" bIns="0" anchor="ctr"/>
             <a:lstStyle/>
             <a:p>
               <a:pPr marL="0" indent="0" algn="l">
                 <a:buNone/>
+                <a:defRPr/>
               </a:pPr>
               <a:r>
-                <a:rPr lang="ko-KR" altLang="en-US" sz="1000" dirty="0">
+                <a:rPr lang="ko-KR" altLang="en-US" sz="1000">
                   <a:solidFill>
                     <a:schemeClr val="tx1">
                       <a:lumMod val="50000"/>
                       <a:lumOff val="50000"/>
                     </a:schemeClr>
                   </a:solidFill>
-                  <a:latin typeface="맑은 고딕" panose="020B0503020000020004" pitchFamily="50" charset="-127"/>
-                  <a:ea typeface="맑은 고딕" panose="020B0503020000020004" pitchFamily="50" charset="-127"/>
-                  <a:cs typeface="Pretendard Variable" pitchFamily="34" charset="-120"/>
+                  <a:latin typeface="맑은 고딕"/>
+                  <a:ea typeface="맑은 고딕"/>
+                  <a:cs typeface="Pretendard Variable"/>
                 </a:rPr>
                 <a:t>예시 </a:t>
               </a:r>
               <a:r>
-                <a:rPr lang="en-US" sz="1000" dirty="0">
+                <a:rPr lang="en-US" sz="1000">
                   <a:solidFill>
                     <a:schemeClr val="tx1">
                       <a:lumMod val="50000"/>
                       <a:lumOff val="50000"/>
                     </a:schemeClr>
                   </a:solidFill>
-                  <a:latin typeface="맑은 고딕" panose="020B0503020000020004" pitchFamily="50" charset="-127"/>
-                  <a:ea typeface="맑은 고딕" panose="020B0503020000020004" pitchFamily="50" charset="-127"/>
-                  <a:cs typeface="Pretendard Variable" pitchFamily="34" charset="-120"/>
+                  <a:latin typeface="맑은 고딕"/>
+                  <a:ea typeface="맑은 고딕"/>
+                  <a:cs typeface="Pretendard Variable"/>
                 </a:rPr>
                 <a:t>: 『업무명』을 매 『주기』 하는 데 『N분』이 걸린다 — 한 줄로 정의</a:t>
               </a:r>
-              <a:endParaRPr lang="en-US" sz="1000" dirty="0">
+              <a:endParaRPr lang="en-US" sz="1000">
                 <a:solidFill>
                   <a:schemeClr val="tx1">
                     <a:lumMod val="50000"/>
                     <a:lumOff val="50000"/>
                   </a:schemeClr>
                 </a:solidFill>
-                <a:latin typeface="맑은 고딕" panose="020B0503020000020004" pitchFamily="50" charset="-127"/>
-                <a:ea typeface="맑은 고딕" panose="020B0503020000020004" pitchFamily="50" charset="-127"/>
+                <a:latin typeface="맑은 고딕"/>
+                <a:ea typeface="맑은 고딕"/>
               </a:endParaRPr>
             </a:p>
           </p:txBody>
@@ -3570,13 +2537,7 @@
       </p:grpSp>
       <p:grpSp>
         <p:nvGrpSpPr>
-          <p:cNvPr id="146" name="그룹 145">
-            <a:extLst>
-              <a:ext uri="{FF2B5EF4-FFF2-40B4-BE49-F238E27FC236}">
-                <a16:creationId xmlns:a16="http://schemas.microsoft.com/office/drawing/2014/main" id="{DF6A92DE-B7C4-1594-6158-13C200DAF511}"/>
-              </a:ext>
-            </a:extLst>
-          </p:cNvPr>
+          <p:cNvPr id="146" name="그룹 145"/>
           <p:cNvGrpSpPr/>
           <p:nvPr/>
         </p:nvGrpSpPr>
@@ -3590,13 +2551,7 @@
         </p:grpSpPr>
         <p:sp>
           <p:nvSpPr>
-            <p:cNvPr id="147" name="Text 14">
-              <a:extLst>
-                <a:ext uri="{FF2B5EF4-FFF2-40B4-BE49-F238E27FC236}">
-                  <a16:creationId xmlns:a16="http://schemas.microsoft.com/office/drawing/2014/main" id="{81BE0952-F06C-C2DD-D21D-B9F6E52C0595}"/>
-                </a:ext>
-              </a:extLst>
-            </p:cNvPr>
+            <p:cNvPr id="147" name="Text 14"/>
             <p:cNvSpPr txBox="1"/>
             <p:nvPr/>
           </p:nvSpPr>
@@ -3612,50 +2567,45 @@
             <a:ln/>
           </p:spPr>
           <p:txBody>
-            <a:bodyPr wrap="none" lIns="0" tIns="0" rIns="0" bIns="0" rtlCol="0" anchor="ctr"/>
+            <a:bodyPr wrap="none" lIns="0" tIns="0" rIns="0" bIns="0" anchor="ctr"/>
             <a:lstStyle/>
             <a:p>
               <a:pPr marL="0" indent="0" algn="l">
                 <a:buNone/>
+                <a:defRPr/>
               </a:pPr>
               <a:r>
-                <a:rPr lang="en-US" sz="2400" b="1" kern="0" spc="-84" dirty="0">
+                <a:rPr lang="en-US" sz="2400" b="1" kern="0" spc="-84">
                   <a:solidFill>
                     <a:srgbClr val="164194"/>
                   </a:solidFill>
-                  <a:latin typeface="맑은 고딕" panose="020B0503020000020004" pitchFamily="50" charset="-127"/>
-                  <a:ea typeface="맑은 고딕" panose="020B0503020000020004" pitchFamily="50" charset="-127"/>
-                  <a:cs typeface="Pretendard Variable" pitchFamily="34" charset="-120"/>
+                  <a:latin typeface="맑은 고딕"/>
+                  <a:ea typeface="맑은 고딕"/>
+                  <a:cs typeface="Pretendard Variable"/>
                 </a:rPr>
                 <a:t>0</a:t>
               </a:r>
               <a:r>
-                <a:rPr lang="en-US" altLang="ko-KR" sz="2400" b="1" kern="0" spc="-84" dirty="0">
+                <a:rPr lang="en-US" altLang="ko-KR" sz="2400" b="1" kern="0" spc="-84">
                   <a:solidFill>
                     <a:srgbClr val="164194"/>
                   </a:solidFill>
-                  <a:latin typeface="맑은 고딕" panose="020B0503020000020004" pitchFamily="50" charset="-127"/>
-                  <a:ea typeface="맑은 고딕" panose="020B0503020000020004" pitchFamily="50" charset="-127"/>
-                  <a:cs typeface="Pretendard Variable" pitchFamily="34" charset="-120"/>
+                  <a:latin typeface="맑은 고딕"/>
+                  <a:ea typeface="맑은 고딕"/>
+                  <a:cs typeface="Pretendard Variable"/>
                 </a:rPr>
                 <a:t>4</a:t>
               </a:r>
-              <a:endParaRPr lang="en-US" sz="2400" dirty="0">
-                <a:latin typeface="맑은 고딕" panose="020B0503020000020004" pitchFamily="50" charset="-127"/>
-                <a:ea typeface="맑은 고딕" panose="020B0503020000020004" pitchFamily="50" charset="-127"/>
+              <a:endParaRPr lang="en-US" sz="2400">
+                <a:latin typeface="맑은 고딕"/>
+                <a:ea typeface="맑은 고딕"/>
               </a:endParaRPr>
             </a:p>
           </p:txBody>
         </p:sp>
         <p:sp>
           <p:nvSpPr>
-            <p:cNvPr id="148" name="Text 16">
-              <a:extLst>
-                <a:ext uri="{FF2B5EF4-FFF2-40B4-BE49-F238E27FC236}">
-                  <a16:creationId xmlns:a16="http://schemas.microsoft.com/office/drawing/2014/main" id="{BCECAD95-C7DE-61E8-D74F-41502FCC10F1}"/>
-                </a:ext>
-              </a:extLst>
-            </p:cNvPr>
+            <p:cNvPr id="148" name="Text 16"/>
             <p:cNvSpPr txBox="1"/>
             <p:nvPr/>
           </p:nvSpPr>
@@ -3671,80 +2621,44 @@
             <a:ln/>
           </p:spPr>
           <p:txBody>
-            <a:bodyPr wrap="none" lIns="0" tIns="0" rIns="0" bIns="0" rtlCol="0" anchor="ctr"/>
+            <a:bodyPr wrap="none" lIns="0" tIns="0" rIns="0" bIns="0" anchor="ctr"/>
             <a:lstStyle/>
             <a:p>
-              <a:r>
-                <a:rPr lang="en-US" altLang="ko-KR" sz="1400" b="1" dirty="0" err="1">
+              <a:pPr lvl="0">
+                <a:defRPr/>
+              </a:pPr>
+              <a:r>
+                <a:rPr lang="en-US" altLang="ko-KR" sz="1400" b="1">
                   <a:solidFill>
                     <a:srgbClr val="1A1A1A"/>
                   </a:solidFill>
-                  <a:latin typeface="맑은 고딕" panose="020B0503020000020004" pitchFamily="50" charset="-127"/>
-                  <a:ea typeface="맑은 고딕" panose="020B0503020000020004" pitchFamily="50" charset="-127"/>
-                  <a:cs typeface="Pretendard Variable" pitchFamily="34" charset="-120"/>
-                </a:rPr>
-                <a:t>검증</a:t>
-              </a:r>
-              <a:r>
-                <a:rPr lang="en-US" altLang="ko-KR" sz="1400" b="1" dirty="0">
-                  <a:solidFill>
-                    <a:srgbClr val="1A1A1A"/>
-                  </a:solidFill>
-                  <a:latin typeface="맑은 고딕" panose="020B0503020000020004" pitchFamily="50" charset="-127"/>
-                  <a:ea typeface="맑은 고딕" panose="020B0503020000020004" pitchFamily="50" charset="-127"/>
-                  <a:cs typeface="Pretendard Variable" pitchFamily="34" charset="-120"/>
-                </a:rPr>
-                <a:t> </a:t>
-              </a:r>
-              <a:r>
-                <a:rPr lang="en-US" altLang="ko-KR" sz="1400" b="1" dirty="0" err="1">
-                  <a:solidFill>
-                    <a:srgbClr val="1A1A1A"/>
-                  </a:solidFill>
-                  <a:latin typeface="맑은 고딕" panose="020B0503020000020004" pitchFamily="50" charset="-127"/>
-                  <a:ea typeface="맑은 고딕" panose="020B0503020000020004" pitchFamily="50" charset="-127"/>
-                  <a:cs typeface="Pretendard Variable" pitchFamily="34" charset="-120"/>
-                </a:rPr>
-                <a:t>방법</a:t>
-              </a:r>
-              <a:r>
-                <a:rPr lang="en-US" altLang="ko-KR" sz="1400" b="1" dirty="0">
-                  <a:solidFill>
-                    <a:srgbClr val="1A1A1A"/>
-                  </a:solidFill>
-                  <a:latin typeface="맑은 고딕" panose="020B0503020000020004" pitchFamily="50" charset="-127"/>
-                  <a:ea typeface="맑은 고딕" panose="020B0503020000020004" pitchFamily="50" charset="-127"/>
-                  <a:cs typeface="Pretendard Variable" pitchFamily="34" charset="-120"/>
-                </a:rPr>
-                <a:t> </a:t>
-              </a:r>
-              <a:r>
-                <a:rPr lang="en-US" altLang="ko-KR" sz="1400" b="1" dirty="0">
+                  <a:latin typeface="맑은 고딕"/>
+                  <a:ea typeface="맑은 고딕"/>
+                  <a:cs typeface="Pretendard Variable"/>
+                </a:rPr>
+                <a:t>검증 방법 </a:t>
+              </a:r>
+              <a:r>
+                <a:rPr lang="en-US" altLang="ko-KR" sz="1400" b="1">
                   <a:solidFill>
                     <a:srgbClr val="9AA6B8"/>
                   </a:solidFill>
-                  <a:latin typeface="맑은 고딕" panose="020B0503020000020004" pitchFamily="50" charset="-127"/>
-                  <a:ea typeface="맑은 고딕" panose="020B0503020000020004" pitchFamily="50" charset="-127"/>
-                  <a:cs typeface="Pretendard Variable" pitchFamily="34" charset="-120"/>
+                  <a:latin typeface="맑은 고딕"/>
+                  <a:ea typeface="맑은 고딕"/>
+                  <a:cs typeface="Pretendard Variable"/>
                 </a:rPr>
                 <a:t>(1줄)</a:t>
               </a:r>
-              <a:endParaRPr lang="en-US" altLang="ko-KR" sz="1400" dirty="0">
-                <a:latin typeface="맑은 고딕" panose="020B0503020000020004" pitchFamily="50" charset="-127"/>
-                <a:ea typeface="맑은 고딕" panose="020B0503020000020004" pitchFamily="50" charset="-127"/>
+              <a:endParaRPr lang="en-US" altLang="ko-KR" sz="1400">
+                <a:latin typeface="맑은 고딕"/>
+                <a:ea typeface="맑은 고딕"/>
               </a:endParaRPr>
             </a:p>
           </p:txBody>
         </p:sp>
         <p:grpSp>
           <p:nvGrpSpPr>
-            <p:cNvPr id="149" name="그룹 148">
-              <a:extLst>
-                <a:ext uri="{FF2B5EF4-FFF2-40B4-BE49-F238E27FC236}">
-                  <a16:creationId xmlns:a16="http://schemas.microsoft.com/office/drawing/2014/main" id="{AD429105-812B-C678-9A64-C4F43615B915}"/>
-                </a:ext>
-              </a:extLst>
-            </p:cNvPr>
+            <p:cNvPr id="149" name="그룹 148"/>
             <p:cNvGrpSpPr/>
             <p:nvPr/>
           </p:nvGrpSpPr>
@@ -3758,22 +2672,18 @@
           </p:grpSpPr>
           <p:pic>
             <p:nvPicPr>
-              <p:cNvPr id="152" name="Image 9" descr="gen-dedup-a4f779325862798106cab1a6fb4b41f4.png">
-                <a:extLst>
-                  <a:ext uri="{FF2B5EF4-FFF2-40B4-BE49-F238E27FC236}">
-                    <a16:creationId xmlns:a16="http://schemas.microsoft.com/office/drawing/2014/main" id="{5AA7658E-D20A-C148-5C01-95F962FF8FA1}"/>
-                  </a:ext>
-                </a:extLst>
-              </p:cNvPr>
+              <p:cNvPr id="152" name="Image 9" descr="gen-dedup-a4f779325862798106cab1a6fb4b41f4.png"/>
               <p:cNvPicPr>
                 <a:picLocks noChangeAspect="1"/>
               </p:cNvPicPr>
               <p:nvPr/>
             </p:nvPicPr>
-            <p:blipFill>
+            <p:blipFill rotWithShape="1">
               <a:blip r:embed="rId4"/>
-              <a:srcRect l="-26" r="-26"/>
-              <a:stretch/>
+              <a:srcRect l="-30" r="-30"/>
+              <a:stretch>
+                <a:fillRect/>
+              </a:stretch>
             </p:blipFill>
             <p:spPr>
               <a:xfrm>
@@ -3787,13 +2697,7 @@
           </p:pic>
           <p:sp>
             <p:nvSpPr>
-              <p:cNvPr id="153" name="Text 19">
-                <a:extLst>
-                  <a:ext uri="{FF2B5EF4-FFF2-40B4-BE49-F238E27FC236}">
-                    <a16:creationId xmlns:a16="http://schemas.microsoft.com/office/drawing/2014/main" id="{DE6D9536-050C-0CFE-182A-33B1BCD3C1F8}"/>
-                  </a:ext>
-                </a:extLst>
-              </p:cNvPr>
+              <p:cNvPr id="153" name="Text 19"/>
               <p:cNvSpPr txBox="1"/>
               <p:nvPr/>
             </p:nvSpPr>
@@ -3809,39 +2713,34 @@
               <a:ln/>
             </p:spPr>
             <p:txBody>
-              <a:bodyPr wrap="none" lIns="0" tIns="0" rIns="0" bIns="0" rtlCol="0" anchor="ctr"/>
+              <a:bodyPr wrap="none" lIns="0" tIns="0" rIns="0" bIns="0" anchor="ctr"/>
               <a:lstStyle/>
               <a:p>
                 <a:pPr marL="0" indent="0" algn="l">
                   <a:buNone/>
+                  <a:defRPr/>
                 </a:pPr>
                 <a:r>
-                  <a:rPr lang="en-US" sz="1400" b="1" kern="0" spc="142" dirty="0">
+                  <a:rPr lang="en-US" sz="1400" b="1" kern="0" spc="142">
                     <a:solidFill>
                       <a:srgbClr val="70AD47"/>
                     </a:solidFill>
-                    <a:latin typeface="맑은 고딕" panose="020B0503020000020004" pitchFamily="50" charset="-127"/>
-                    <a:ea typeface="맑은 고딕" panose="020B0503020000020004" pitchFamily="50" charset="-127"/>
-                    <a:cs typeface="Pretendard Variable" pitchFamily="34" charset="-120"/>
+                    <a:latin typeface="맑은 고딕"/>
+                    <a:ea typeface="맑은 고딕"/>
+                    <a:cs typeface="Pretendard Variable"/>
                   </a:rPr>
                   <a:t>왜 작성하는가?</a:t>
                 </a:r>
-                <a:endParaRPr lang="en-US" sz="1400" dirty="0">
-                  <a:latin typeface="맑은 고딕" panose="020B0503020000020004" pitchFamily="50" charset="-127"/>
-                  <a:ea typeface="맑은 고딕" panose="020B0503020000020004" pitchFamily="50" charset="-127"/>
+                <a:endParaRPr lang="en-US" sz="1400">
+                  <a:latin typeface="맑은 고딕"/>
+                  <a:ea typeface="맑은 고딕"/>
                 </a:endParaRPr>
               </a:p>
             </p:txBody>
           </p:sp>
           <p:sp>
             <p:nvSpPr>
-              <p:cNvPr id="154" name="Text 20">
-                <a:extLst>
-                  <a:ext uri="{FF2B5EF4-FFF2-40B4-BE49-F238E27FC236}">
-                    <a16:creationId xmlns:a16="http://schemas.microsoft.com/office/drawing/2014/main" id="{0EA5EACC-5BB8-E392-8423-EA0A274E8B9E}"/>
-                  </a:ext>
-                </a:extLst>
-              </p:cNvPr>
+              <p:cNvPr id="154" name="Text 20"/>
               <p:cNvSpPr txBox="1"/>
               <p:nvPr/>
             </p:nvSpPr>
@@ -3857,101 +2756,47 @@
               <a:ln/>
             </p:spPr>
             <p:txBody>
-              <a:bodyPr wrap="square" lIns="0" tIns="0" rIns="0" bIns="0" rtlCol="0" anchor="ctr"/>
+              <a:bodyPr wrap="square" lIns="0" tIns="0" rIns="0" bIns="0" anchor="ctr"/>
               <a:lstStyle/>
               <a:p>
                 <a:pPr>
                   <a:lnSpc>
                     <a:spcPts val="1238"/>
                   </a:lnSpc>
+                  <a:defRPr/>
                 </a:pPr>
                 <a:r>
-                  <a:rPr lang="en-US" altLang="ko-KR" sz="1200" dirty="0" err="1">
+                  <a:rPr lang="en-US" altLang="ko-KR" sz="1200">
                     <a:solidFill>
                       <a:srgbClr val="1A1A1A"/>
                     </a:solidFill>
-                    <a:latin typeface="맑은 고딕" panose="020B0503020000020004" pitchFamily="50" charset="-127"/>
-                    <a:ea typeface="맑은 고딕" panose="020B0503020000020004" pitchFamily="50" charset="-127"/>
-                    <a:cs typeface="Pretendard Variable" pitchFamily="34" charset="-120"/>
+                    <a:latin typeface="맑은 고딕"/>
+                    <a:ea typeface="맑은 고딕"/>
+                    <a:cs typeface="Pretendard Variable"/>
                   </a:rPr>
-                  <a:t>효과를</a:t>
+                  <a:t>효과를 </a:t>
                 </a:r>
                 <a:r>
-                  <a:rPr lang="en-US" altLang="ko-KR" sz="1200" dirty="0">
+                  <a:rPr lang="en-US" altLang="ko-KR" sz="1200" b="1">
+                    <a:solidFill>
+                      <a:srgbClr val="70AD47"/>
+                    </a:solidFill>
+                    <a:latin typeface="맑은 고딕"/>
+                    <a:ea typeface="맑은 고딕"/>
+                    <a:cs typeface="Pretendard Variable"/>
+                  </a:rPr>
+                  <a:t>측정할 수 있어야</a:t>
+                </a:r>
+                <a:r>
+                  <a:rPr lang="en-US" altLang="ko-KR" sz="1200">
                     <a:solidFill>
                       <a:srgbClr val="1A1A1A"/>
                     </a:solidFill>
-                    <a:latin typeface="맑은 고딕" panose="020B0503020000020004" pitchFamily="50" charset="-127"/>
-                    <a:ea typeface="맑은 고딕" panose="020B0503020000020004" pitchFamily="50" charset="-127"/>
-                    <a:cs typeface="Pretendard Variable" pitchFamily="34" charset="-120"/>
+                    <a:latin typeface="맑은 고딕"/>
+                    <a:ea typeface="맑은 고딕"/>
+                    <a:cs typeface="Pretendard Variable"/>
                   </a:rPr>
-                  <a:t> </a:t>
-                </a:r>
-                <a:r>
-                  <a:rPr lang="en-US" altLang="ko-KR" sz="1200" b="1" dirty="0" err="1">
-                    <a:solidFill>
-                      <a:srgbClr val="70AD47"/>
-                    </a:solidFill>
-                    <a:latin typeface="맑은 고딕" panose="020B0503020000020004" pitchFamily="50" charset="-127"/>
-                    <a:ea typeface="맑은 고딕" panose="020B0503020000020004" pitchFamily="50" charset="-127"/>
-                    <a:cs typeface="Pretendard Variable" pitchFamily="34" charset="-120"/>
-                  </a:rPr>
-                  <a:t>측정할</a:t>
-                </a:r>
-                <a:r>
-                  <a:rPr lang="en-US" altLang="ko-KR" sz="1200" b="1" dirty="0">
-                    <a:solidFill>
-                      <a:srgbClr val="70AD47"/>
-                    </a:solidFill>
-                    <a:latin typeface="맑은 고딕" panose="020B0503020000020004" pitchFamily="50" charset="-127"/>
-                    <a:ea typeface="맑은 고딕" panose="020B0503020000020004" pitchFamily="50" charset="-127"/>
-                    <a:cs typeface="Pretendard Variable" pitchFamily="34" charset="-120"/>
-                  </a:rPr>
-                  <a:t> 수 </a:t>
-                </a:r>
-                <a:r>
-                  <a:rPr lang="en-US" altLang="ko-KR" sz="1200" b="1" dirty="0" err="1">
-                    <a:solidFill>
-                      <a:srgbClr val="70AD47"/>
-                    </a:solidFill>
-                    <a:latin typeface="맑은 고딕" panose="020B0503020000020004" pitchFamily="50" charset="-127"/>
-                    <a:ea typeface="맑은 고딕" panose="020B0503020000020004" pitchFamily="50" charset="-127"/>
-                    <a:cs typeface="Pretendard Variable" pitchFamily="34" charset="-120"/>
-                  </a:rPr>
-                  <a:t>있어야</a:t>
-                </a:r>
-                <a:r>
-                  <a:rPr lang="en-US" altLang="ko-KR" sz="1200" dirty="0">
-                    <a:solidFill>
-                      <a:srgbClr val="1A1A1A"/>
-                    </a:solidFill>
-                    <a:latin typeface="맑은 고딕" panose="020B0503020000020004" pitchFamily="50" charset="-127"/>
-                    <a:ea typeface="맑은 고딕" panose="020B0503020000020004" pitchFamily="50" charset="-127"/>
-                    <a:cs typeface="Pretendard Variable" pitchFamily="34" charset="-120"/>
-                  </a:rPr>
-                  <a:t> </a:t>
-                </a:r>
-                <a:r>
-                  <a:rPr lang="en-US" altLang="ko-KR" sz="1200" dirty="0" err="1">
-                    <a:solidFill>
-                      <a:srgbClr val="1A1A1A"/>
-                    </a:solidFill>
-                    <a:latin typeface="맑은 고딕" panose="020B0503020000020004" pitchFamily="50" charset="-127"/>
-                    <a:ea typeface="맑은 고딕" panose="020B0503020000020004" pitchFamily="50" charset="-127"/>
-                    <a:cs typeface="Pretendard Variable" pitchFamily="34" charset="-120"/>
-                  </a:rPr>
-                  <a:t>인정받습니다</a:t>
-                </a:r>
-                <a:r>
-                  <a:rPr lang="en-US" altLang="ko-KR" sz="1200" dirty="0">
-                    <a:solidFill>
-                      <a:srgbClr val="1A1A1A"/>
-                    </a:solidFill>
-                    <a:latin typeface="맑은 고딕" panose="020B0503020000020004" pitchFamily="50" charset="-127"/>
-                    <a:ea typeface="맑은 고딕" panose="020B0503020000020004" pitchFamily="50" charset="-127"/>
-                    <a:cs typeface="Pretendard Variable" pitchFamily="34" charset="-120"/>
-                  </a:rPr>
-                  <a:t>. </a:t>
+                  <a:t> 인정받습니다. </a:t>
                 </a:r>
               </a:p>
               <a:p>
@@ -3959,98 +2804,33 @@
                   <a:lnSpc>
                     <a:spcPts val="1238"/>
                   </a:lnSpc>
+                  <a:defRPr/>
                 </a:pPr>
                 <a:r>
-                  <a:rPr lang="en-US" altLang="ko-KR" sz="1200" b="1" dirty="0">
+                  <a:rPr lang="en-US" altLang="ko-KR" sz="1200" b="1">
                     <a:solidFill>
                       <a:srgbClr val="FF0000"/>
                     </a:solidFill>
-                    <a:latin typeface="맑은 고딕" panose="020B0503020000020004" pitchFamily="50" charset="-127"/>
-                    <a:ea typeface="맑은 고딕" panose="020B0503020000020004" pitchFamily="50" charset="-127"/>
-                    <a:cs typeface="Pretendard Variable" pitchFamily="34" charset="-120"/>
+                    <a:latin typeface="맑은 고딕"/>
+                    <a:ea typeface="맑은 고딕"/>
+                    <a:cs typeface="Pretendard Variable"/>
                   </a:rPr>
-                  <a:t>‘</a:t>
+                  <a:t>‘사람 검토’</a:t>
                 </a:r>
                 <a:r>
-                  <a:rPr lang="en-US" altLang="ko-KR" sz="1200" b="1" dirty="0" err="1">
-                    <a:solidFill>
-                      <a:srgbClr val="FF0000"/>
-                    </a:solidFill>
-                    <a:latin typeface="맑은 고딕" panose="020B0503020000020004" pitchFamily="50" charset="-127"/>
-                    <a:ea typeface="맑은 고딕" panose="020B0503020000020004" pitchFamily="50" charset="-127"/>
-                    <a:cs typeface="Pretendard Variable" pitchFamily="34" charset="-120"/>
-                  </a:rPr>
-                  <a:t>사람</a:t>
-                </a:r>
-                <a:r>
-                  <a:rPr lang="en-US" altLang="ko-KR" sz="1200" b="1" dirty="0">
-                    <a:solidFill>
-                      <a:srgbClr val="FF0000"/>
-                    </a:solidFill>
-                    <a:latin typeface="맑은 고딕" panose="020B0503020000020004" pitchFamily="50" charset="-127"/>
-                    <a:ea typeface="맑은 고딕" panose="020B0503020000020004" pitchFamily="50" charset="-127"/>
-                    <a:cs typeface="Pretendard Variable" pitchFamily="34" charset="-120"/>
-                  </a:rPr>
-                  <a:t> </a:t>
-                </a:r>
-                <a:r>
-                  <a:rPr lang="en-US" altLang="ko-KR" sz="1200" b="1" dirty="0" err="1">
-                    <a:solidFill>
-                      <a:srgbClr val="FF0000"/>
-                    </a:solidFill>
-                    <a:latin typeface="맑은 고딕" panose="020B0503020000020004" pitchFamily="50" charset="-127"/>
-                    <a:ea typeface="맑은 고딕" panose="020B0503020000020004" pitchFamily="50" charset="-127"/>
-                    <a:cs typeface="Pretendard Variable" pitchFamily="34" charset="-120"/>
-                  </a:rPr>
-                  <a:t>검토’</a:t>
-                </a:r>
-                <a:r>
-                  <a:rPr lang="en-US" altLang="ko-KR" sz="1200" dirty="0" err="1">
+                  <a:rPr lang="en-US" altLang="ko-KR" sz="1200">
                     <a:solidFill>
                       <a:srgbClr val="1A1A1A"/>
                     </a:solidFill>
-                    <a:latin typeface="맑은 고딕" panose="020B0503020000020004" pitchFamily="50" charset="-127"/>
-                    <a:ea typeface="맑은 고딕" panose="020B0503020000020004" pitchFamily="50" charset="-127"/>
-                    <a:cs typeface="Pretendard Variable" pitchFamily="34" charset="-120"/>
+                    <a:latin typeface="맑은 고딕"/>
+                    <a:ea typeface="맑은 고딕"/>
+                    <a:cs typeface="Pretendard Variable"/>
                   </a:rPr>
-                  <a:t>를</a:t>
+                  <a:t>를 꼭 포함하세요.</a:t>
                 </a:r>
-                <a:r>
-                  <a:rPr lang="en-US" altLang="ko-KR" sz="1200" dirty="0">
-                    <a:solidFill>
-                      <a:srgbClr val="1A1A1A"/>
-                    </a:solidFill>
-                    <a:latin typeface="맑은 고딕" panose="020B0503020000020004" pitchFamily="50" charset="-127"/>
-                    <a:ea typeface="맑은 고딕" panose="020B0503020000020004" pitchFamily="50" charset="-127"/>
-                    <a:cs typeface="Pretendard Variable" pitchFamily="34" charset="-120"/>
-                  </a:rPr>
-                  <a:t> 꼭 </a:t>
-                </a:r>
-                <a:r>
-                  <a:rPr lang="en-US" altLang="ko-KR" sz="1200" dirty="0" err="1">
-                    <a:solidFill>
-                      <a:srgbClr val="1A1A1A"/>
-                    </a:solidFill>
-                    <a:latin typeface="맑은 고딕" panose="020B0503020000020004" pitchFamily="50" charset="-127"/>
-                    <a:ea typeface="맑은 고딕" panose="020B0503020000020004" pitchFamily="50" charset="-127"/>
-                    <a:cs typeface="Pretendard Variable" pitchFamily="34" charset="-120"/>
-                  </a:rPr>
-                  <a:t>포함하세요</a:t>
-                </a:r>
-                <a:r>
-                  <a:rPr lang="en-US" altLang="ko-KR" sz="1200" dirty="0">
-                    <a:solidFill>
-                      <a:srgbClr val="1A1A1A"/>
-                    </a:solidFill>
-                    <a:latin typeface="맑은 고딕" panose="020B0503020000020004" pitchFamily="50" charset="-127"/>
-                    <a:ea typeface="맑은 고딕" panose="020B0503020000020004" pitchFamily="50" charset="-127"/>
-                    <a:cs typeface="Pretendard Variable" pitchFamily="34" charset="-120"/>
-                  </a:rPr>
-                  <a:t>.</a:t>
-                </a:r>
-                <a:endParaRPr lang="en-US" altLang="ko-KR" sz="1200" dirty="0">
-                  <a:latin typeface="맑은 고딕" panose="020B0503020000020004" pitchFamily="50" charset="-127"/>
-                  <a:ea typeface="맑은 고딕" panose="020B0503020000020004" pitchFamily="50" charset="-127"/>
+                <a:endParaRPr lang="en-US" altLang="ko-KR" sz="1200">
+                  <a:latin typeface="맑은 고딕"/>
+                  <a:ea typeface="맑은 고딕"/>
                 </a:endParaRPr>
               </a:p>
             </p:txBody>
@@ -4058,13 +2838,7 @@
         </p:grpSp>
         <p:sp>
           <p:nvSpPr>
-            <p:cNvPr id="150" name="직사각형 149">
-              <a:extLst>
-                <a:ext uri="{FF2B5EF4-FFF2-40B4-BE49-F238E27FC236}">
-                  <a16:creationId xmlns:a16="http://schemas.microsoft.com/office/drawing/2014/main" id="{6ED63E20-D528-92FD-4C65-46E650A50D2C}"/>
-                </a:ext>
-              </a:extLst>
-            </p:cNvPr>
+            <p:cNvPr id="150" name="직사각형 149"/>
             <p:cNvSpPr/>
             <p:nvPr/>
           </p:nvSpPr>
@@ -4102,10 +2876,10 @@
             </a:fontRef>
           </p:style>
           <p:txBody>
-            <a:bodyPr rtlCol="0" anchor="ctr"/>
+            <a:bodyPr anchor="ctr"/>
             <a:lstStyle/>
             <a:p>
-              <a:pPr marL="0" marR="0" lvl="0" indent="0" defTabSz="914400" rtl="0" eaLnBrk="1" fontAlgn="auto" latinLnBrk="1" hangingPunct="1">
+              <a:pPr marL="0" marR="0" lvl="0" indent="0" defTabSz="914400" rtl="0" eaLnBrk="1" latinLnBrk="1" hangingPunct="1">
                 <a:lnSpc>
                   <a:spcPct val="100000"/>
                 </a:lnSpc>
@@ -4116,31 +2890,23 @@
                   <a:spcPts val="0"/>
                 </a:spcAft>
                 <a:buClrTx/>
-                <a:buSzTx/>
                 <a:buFontTx/>
                 <a:buNone/>
-                <a:tabLst/>
                 <a:defRPr/>
               </a:pPr>
-              <a:endParaRPr lang="ko-KR" altLang="en-US" sz="1100" dirty="0">
+              <a:endParaRPr lang="ko-KR" altLang="en-US" sz="1100">
                 <a:solidFill>
                   <a:schemeClr val="tx1"/>
                 </a:solidFill>
-                <a:latin typeface="맑은 고딕" panose="020B0503020000020004" pitchFamily="50" charset="-127"/>
-                <a:ea typeface="맑은 고딕" panose="020B0503020000020004" pitchFamily="50" charset="-127"/>
+                <a:latin typeface="맑은 고딕"/>
+                <a:ea typeface="맑은 고딕"/>
               </a:endParaRPr>
             </a:p>
           </p:txBody>
         </p:sp>
         <p:sp>
           <p:nvSpPr>
-            <p:cNvPr id="151" name="Text 17">
-              <a:extLst>
-                <a:ext uri="{FF2B5EF4-FFF2-40B4-BE49-F238E27FC236}">
-                  <a16:creationId xmlns:a16="http://schemas.microsoft.com/office/drawing/2014/main" id="{D67BE580-0825-813D-C328-D113BA853F0E}"/>
-                </a:ext>
-              </a:extLst>
-            </p:cNvPr>
+            <p:cNvPr id="151" name="Text 17"/>
             <p:cNvSpPr txBox="1"/>
             <p:nvPr/>
           </p:nvSpPr>
@@ -4156,107 +2922,108 @@
             <a:ln/>
           </p:spPr>
           <p:txBody>
-            <a:bodyPr wrap="none" lIns="0" tIns="0" rIns="0" bIns="0" rtlCol="0" anchor="ctr"/>
+            <a:bodyPr wrap="none" lIns="0" tIns="0" rIns="0" bIns="0" anchor="ctr"/>
             <a:lstStyle/>
             <a:p>
               <a:pPr marL="0" indent="0" algn="l">
                 <a:buNone/>
+                <a:defRPr/>
               </a:pPr>
               <a:r>
-                <a:rPr lang="ko-KR" altLang="en-US" sz="1000" dirty="0">
+                <a:rPr lang="ko-KR" altLang="en-US" sz="1000">
                   <a:solidFill>
                     <a:schemeClr val="tx1">
                       <a:lumMod val="50000"/>
                       <a:lumOff val="50000"/>
                     </a:schemeClr>
                   </a:solidFill>
-                  <a:latin typeface="맑은 고딕" panose="020B0503020000020004" pitchFamily="50" charset="-127"/>
-                  <a:ea typeface="맑은 고딕" panose="020B0503020000020004" pitchFamily="50" charset="-127"/>
-                  <a:cs typeface="Pretendard Variable" pitchFamily="34" charset="-120"/>
+                  <a:latin typeface="맑은 고딕"/>
+                  <a:ea typeface="맑은 고딕"/>
+                  <a:cs typeface="Pretendard Variable"/>
                 </a:rPr>
                 <a:t>예시 </a:t>
               </a:r>
               <a:r>
-                <a:rPr lang="en-US" altLang="ko-KR" sz="1000" dirty="0">
+                <a:rPr lang="en-US" altLang="ko-KR" sz="1000">
                   <a:solidFill>
                     <a:schemeClr val="tx1">
                       <a:lumMod val="50000"/>
                       <a:lumOff val="50000"/>
                     </a:schemeClr>
                   </a:solidFill>
-                  <a:latin typeface="맑은 고딕" panose="020B0503020000020004" pitchFamily="50" charset="-127"/>
-                  <a:ea typeface="맑은 고딕" panose="020B0503020000020004" pitchFamily="50" charset="-127"/>
-                  <a:cs typeface="Pretendard Variable" pitchFamily="34" charset="-120"/>
+                  <a:latin typeface="맑은 고딕"/>
+                  <a:ea typeface="맑은 고딕"/>
+                  <a:cs typeface="Pretendard Variable"/>
                 </a:rPr>
                 <a:t>: </a:t>
               </a:r>
               <a:r>
-                <a:rPr lang="ko-KR" altLang="en-US" sz="1000" dirty="0">
+                <a:rPr lang="ko-KR" altLang="en-US" sz="1000">
                   <a:solidFill>
                     <a:schemeClr val="tx1">
                       <a:lumMod val="50000"/>
                       <a:lumOff val="50000"/>
                     </a:schemeClr>
                   </a:solidFill>
-                  <a:latin typeface="맑은 고딕" panose="020B0503020000020004" pitchFamily="50" charset="-127"/>
-                  <a:ea typeface="맑은 고딕" panose="020B0503020000020004" pitchFamily="50" charset="-127"/>
-                  <a:cs typeface="Pretendard Variable" pitchFamily="34" charset="-120"/>
+                  <a:latin typeface="맑은 고딕"/>
+                  <a:ea typeface="맑은 고딕"/>
+                  <a:cs typeface="Pretendard Variable"/>
                 </a:rPr>
                 <a:t>어떤 지표로 </a:t>
               </a:r>
               <a:r>
-                <a:rPr lang="en-US" altLang="ko-KR" sz="1000" dirty="0">
+                <a:rPr lang="en-US" altLang="ko-KR" sz="1000">
                   <a:solidFill>
                     <a:schemeClr val="tx1">
                       <a:lumMod val="50000"/>
                       <a:lumOff val="50000"/>
                     </a:schemeClr>
                   </a:solidFill>
-                  <a:latin typeface="맑은 고딕" panose="020B0503020000020004" pitchFamily="50" charset="-127"/>
-                  <a:ea typeface="맑은 고딕" panose="020B0503020000020004" pitchFamily="50" charset="-127"/>
-                  <a:cs typeface="Pretendard Variable" pitchFamily="34" charset="-120"/>
+                  <a:latin typeface="맑은 고딕"/>
+                  <a:ea typeface="맑은 고딕"/>
+                  <a:cs typeface="Pretendard Variable"/>
                 </a:rPr>
                 <a:t>/ </a:t>
               </a:r>
               <a:r>
-                <a:rPr lang="ko-KR" altLang="en-US" sz="1000" dirty="0">
+                <a:rPr lang="ko-KR" altLang="en-US" sz="1000">
                   <a:solidFill>
                     <a:schemeClr val="tx1">
                       <a:lumMod val="50000"/>
                       <a:lumOff val="50000"/>
                     </a:schemeClr>
                   </a:solidFill>
-                  <a:latin typeface="맑은 고딕" panose="020B0503020000020004" pitchFamily="50" charset="-127"/>
-                  <a:ea typeface="맑은 고딕" panose="020B0503020000020004" pitchFamily="50" charset="-127"/>
-                  <a:cs typeface="Pretendard Variable" pitchFamily="34" charset="-120"/>
+                  <a:latin typeface="맑은 고딕"/>
+                  <a:ea typeface="맑은 고딕"/>
+                  <a:cs typeface="Pretendard Variable"/>
                 </a:rPr>
                 <a:t>누가 </a:t>
               </a:r>
               <a:r>
-                <a:rPr lang="en-US" altLang="ko-KR" sz="1000" dirty="0">
+                <a:rPr lang="en-US" altLang="ko-KR" sz="1000">
                   <a:solidFill>
                     <a:schemeClr val="tx1">
                       <a:lumMod val="50000"/>
                       <a:lumOff val="50000"/>
                     </a:schemeClr>
                   </a:solidFill>
-                  <a:latin typeface="맑은 고딕" panose="020B0503020000020004" pitchFamily="50" charset="-127"/>
-                  <a:ea typeface="맑은 고딕" panose="020B0503020000020004" pitchFamily="50" charset="-127"/>
-                  <a:cs typeface="Pretendard Variable" pitchFamily="34" charset="-120"/>
+                  <a:latin typeface="맑은 고딕"/>
+                  <a:ea typeface="맑은 고딕"/>
+                  <a:cs typeface="Pretendard Variable"/>
                 </a:rPr>
                 <a:t>/ </a:t>
               </a:r>
               <a:r>
-                <a:rPr lang="ko-KR" altLang="en-US" sz="1000" dirty="0">
+                <a:rPr lang="ko-KR" altLang="en-US" sz="1000">
                   <a:solidFill>
                     <a:schemeClr val="tx1">
                       <a:lumMod val="50000"/>
                       <a:lumOff val="50000"/>
                     </a:schemeClr>
                   </a:solidFill>
-                  <a:latin typeface="맑은 고딕" panose="020B0503020000020004" pitchFamily="50" charset="-127"/>
-                  <a:ea typeface="맑은 고딕" panose="020B0503020000020004" pitchFamily="50" charset="-127"/>
-                  <a:cs typeface="Pretendard Variable" pitchFamily="34" charset="-120"/>
+                  <a:latin typeface="맑은 고딕"/>
+                  <a:ea typeface="맑은 고딕"/>
+                  <a:cs typeface="Pretendard Variable"/>
                 </a:rPr>
                 <a:t>언제 확인할지</a:t>
               </a:r>
@@ -4264,11 +3031,161 @@
           </p:txBody>
         </p:sp>
       </p:grpSp>
+      <p:sp>
+        <p:nvSpPr>
+          <p:cNvPr id="3" name="Text 17">
+            <a:extLst>
+              <a:ext uri="{FF2B5EF4-FFF2-40B4-BE49-F238E27FC236}">
+                <a16:creationId xmlns:a16="http://schemas.microsoft.com/office/drawing/2014/main" id="{8EE4F433-71C2-83D6-5A85-5E1AD8886718}"/>
+              </a:ext>
+            </a:extLst>
+          </p:cNvPr>
+          <p:cNvSpPr txBox="1"/>
+          <p:nvPr/>
+        </p:nvSpPr>
+        <p:spPr>
+          <a:xfrm>
+            <a:off x="914400" y="3048000"/>
+            <a:ext cx="6477000" cy="135534"/>
+          </a:xfrm>
+          <a:prstGeom prst="rect">
+            <a:avLst/>
+          </a:prstGeom>
+          <a:noFill/>
+          <a:ln/>
+        </p:spPr>
+        <p:txBody>
+          <a:bodyPr wrap="none" lIns="0" tIns="0" rIns="0" bIns="0" anchor="ctr"/>
+          <a:lstStyle/>
+          <a:p>
+            <a:pPr marL="0" indent="0" algn="l">
+              <a:buNone/>
+              <a:defRPr/>
+            </a:pPr>
+            <a:r>
+              <a:rPr lang="ko-KR" altLang="en-US" sz="1000">
+                <a:solidFill>
+                  <a:schemeClr val="tx1">
+                    <a:lumMod val="50000"/>
+                    <a:lumOff val="50000"/>
+                  </a:schemeClr>
+                </a:solidFill>
+                <a:latin typeface="맑은 고딕"/>
+                <a:ea typeface="맑은 고딕"/>
+                <a:cs typeface="Pretendard Variable"/>
+              </a:rPr>
+              <a:t>예시 </a:t>
+            </a:r>
+            <a:r>
+              <a:rPr lang="en-US" altLang="ko-KR" sz="1000">
+                <a:solidFill>
+                  <a:schemeClr val="tx1">
+                    <a:lumMod val="50000"/>
+                    <a:lumOff val="50000"/>
+                  </a:schemeClr>
+                </a:solidFill>
+                <a:latin typeface="맑은 고딕"/>
+                <a:ea typeface="맑은 고딕"/>
+                <a:cs typeface="Pretendard Variable"/>
+              </a:rPr>
+              <a:t>: </a:t>
+            </a:r>
+            <a:r>
+              <a:rPr lang="ko-KR" altLang="en-US" sz="1000">
+                <a:solidFill>
+                  <a:schemeClr val="tx1">
+                    <a:lumMod val="50000"/>
+                    <a:lumOff val="50000"/>
+                  </a:schemeClr>
+                </a:solidFill>
+                <a:latin typeface="맑은 고딕"/>
+                <a:ea typeface="맑은 고딕"/>
+                <a:cs typeface="Pretendard Variable"/>
+              </a:rPr>
+              <a:t>회의 메모를 </a:t>
+            </a:r>
+            <a:r>
+              <a:rPr lang="en-US" altLang="ko-KR" sz="1000">
+                <a:solidFill>
+                  <a:schemeClr val="tx1">
+                    <a:lumMod val="50000"/>
+                    <a:lumOff val="50000"/>
+                  </a:schemeClr>
+                </a:solidFill>
+                <a:latin typeface="맑은 고딕"/>
+                <a:ea typeface="맑은 고딕"/>
+                <a:cs typeface="Pretendard Variable"/>
+              </a:rPr>
+              <a:t>Claude Code </a:t>
+            </a:r>
+            <a:r>
+              <a:rPr lang="ko-KR" altLang="en-US" sz="1000">
+                <a:solidFill>
+                  <a:schemeClr val="tx1">
+                    <a:lumMod val="50000"/>
+                    <a:lumOff val="50000"/>
+                  </a:schemeClr>
+                </a:solidFill>
+                <a:latin typeface="맑은 고딕"/>
+                <a:ea typeface="맑은 고딕"/>
+                <a:cs typeface="Pretendard Variable"/>
+              </a:rPr>
+              <a:t>에 읽히고</a:t>
+            </a:r>
+            <a:r>
+              <a:rPr lang="en-US" altLang="ko-KR" sz="1000">
+                <a:solidFill>
+                  <a:schemeClr val="tx1">
+                    <a:lumMod val="50000"/>
+                    <a:lumOff val="50000"/>
+                  </a:schemeClr>
+                </a:solidFill>
+                <a:latin typeface="맑은 고딕"/>
+                <a:ea typeface="맑은 고딕"/>
+                <a:cs typeface="Pretendard Variable"/>
+              </a:rPr>
+              <a:t>, CLAUDE.md </a:t>
+            </a:r>
+            <a:r>
+              <a:rPr lang="ko-KR" altLang="en-US" sz="1000">
+                <a:solidFill>
+                  <a:schemeClr val="tx1">
+                    <a:lumMod val="50000"/>
+                    <a:lumOff val="50000"/>
+                  </a:schemeClr>
+                </a:solidFill>
+                <a:latin typeface="맑은 고딕"/>
+                <a:ea typeface="맑은 고딕"/>
+                <a:cs typeface="Pretendard Variable"/>
+              </a:rPr>
+              <a:t>에 적어 둔 양식대로 회의록 초안을 만들게 한다</a:t>
+            </a:r>
+            <a:endParaRPr lang="en-US" sz="1000">
+              <a:solidFill>
+                <a:schemeClr val="tx1">
+                  <a:lumMod val="50000"/>
+                  <a:lumOff val="50000"/>
+                </a:schemeClr>
+              </a:solidFill>
+              <a:latin typeface="맑은 고딕"/>
+              <a:ea typeface="맑은 고딕"/>
+            </a:endParaRPr>
+          </a:p>
+        </p:txBody>
+      </p:sp>
     </p:spTree>
   </p:cSld>
   <p:clrMapOvr>
     <a:masterClrMapping/>
   </p:clrMapOvr>
+  <mc:AlternateContent xmlns:mc="http://schemas.openxmlformats.org/markup-compatibility/2006" xmlns:p14="http://schemas.microsoft.com/office/powerpoint/2010/main">
+    <mc:Choice Requires="p14">
+      <p:transition/>
+    </mc:Choice>
+    <mc:Fallback xmlns:dsp="http://schemas.microsoft.com/office/drawing/2008/diagram" xmlns:dgm="http://schemas.openxmlformats.org/drawingml/2006/diagram" xmlns:c="http://schemas.openxmlformats.org/drawingml/2006/chart" xmlns="">
+      <p:transition/>
+    </mc:Fallback>
+  </mc:AlternateContent>
 </p:sld>
 </file>
 
@@ -4318,7 +3235,7 @@
         <a:latin typeface="Calibri Light" panose="020F0302020204030204"/>
         <a:ea typeface=""/>
         <a:cs typeface=""/>
-        <a:font script="Jpan" typeface="游ゴシック Light"/>
+        <a:font script="Jpan" typeface="Yu Gothic Light"/>
         <a:font script="Hang" typeface="맑은 고딕"/>
         <a:font script="Hans" typeface="等线 Light"/>
         <a:font script="Hant" typeface="新細明體"/>
@@ -4370,7 +3287,7 @@
         <a:latin typeface="Calibri" panose="020F0502020204030204"/>
         <a:ea typeface=""/>
         <a:cs typeface=""/>
-        <a:font script="Jpan" typeface="游ゴシック"/>
+        <a:font script="Jpan" typeface="Yu Gothic"/>
         <a:font script="Hang" typeface="맑은 고딕"/>
         <a:font script="Hans" typeface="等线"/>
         <a:font script="Hant" typeface="新細明體"/>
@@ -4483,21 +3400,21 @@
             <a:schemeClr val="phClr"/>
           </a:solidFill>
           <a:prstDash val="solid"/>
-          <a:miter lim="800000"/>
+          <a:miter/>
         </a:ln>
         <a:ln w="12700" cap="flat" cmpd="sng" algn="ctr">
           <a:solidFill>
             <a:schemeClr val="phClr"/>
           </a:solidFill>
           <a:prstDash val="solid"/>
-          <a:miter lim="800000"/>
+          <a:miter/>
         </a:ln>
         <a:ln w="19050" cap="flat" cmpd="sng" algn="ctr">
           <a:solidFill>
             <a:schemeClr val="phClr"/>
           </a:solidFill>
           <a:prstDash val="solid"/>
-          <a:miter lim="800000"/>
+          <a:miter/>
         </a:ln>
       </a:lnStyleLst>
       <a:effectStyleLst>
@@ -4559,11 +3476,6 @@
   </a:themeElements>
   <a:objectDefaults/>
   <a:extraClrSchemeLst/>
-  <a:extLst>
-    <a:ext uri="{05A4C25C-085E-4340-85A3-A5531E510DB2}">
-      <thm15:themeFamily xmlns:thm15="http://schemas.microsoft.com/office/thememl/2012/main" name="Office Theme" id="{62F939B6-93AF-4DB8-9C6B-D6C7DFDC589F}" vid="{4A3C46E8-61CC-4603-A589-7422A47A8E4A}"/>
-    </a:ext>
-  </a:extLst>
 </a:theme>
 </file>
 
@@ -4613,7 +3525,7 @@
         <a:latin typeface="맑은 고딕" panose="02110004020202020204"/>
         <a:ea typeface=""/>
         <a:cs typeface=""/>
-        <a:font script="Jpan" typeface="游ゴシック Light"/>
+        <a:font script="Jpan" typeface="Yu Gothic Light"/>
         <a:font script="Hang" typeface="맑은 고딕"/>
         <a:font script="Hans" typeface="等线 Light"/>
         <a:font script="Hant" typeface="新細明體"/>
@@ -4665,7 +3577,7 @@
         <a:latin typeface="맑은 고딕" panose="02110004020202020204"/>
         <a:ea typeface=""/>
         <a:cs typeface=""/>
-        <a:font script="Jpan" typeface="游ゴシック"/>
+        <a:font script="Jpan" typeface="Yu Gothic"/>
         <a:font script="Hang" typeface="맑은 고딕"/>
         <a:font script="Hans" typeface="等线"/>
         <a:font script="Hant" typeface="新細明體"/>
@@ -4778,21 +3690,21 @@
             <a:schemeClr val="phClr"/>
           </a:solidFill>
           <a:prstDash val="solid"/>
-          <a:miter lim="800000"/>
+          <a:miter/>
         </a:ln>
         <a:ln w="19050" cap="flat" cmpd="sng" algn="ctr">
           <a:solidFill>
             <a:schemeClr val="phClr"/>
           </a:solidFill>
           <a:prstDash val="solid"/>
-          <a:miter lim="800000"/>
+          <a:miter/>
         </a:ln>
         <a:ln w="25400" cap="flat" cmpd="sng" algn="ctr">
           <a:solidFill>
             <a:schemeClr val="phClr"/>
           </a:solidFill>
           <a:prstDash val="solid"/>
-          <a:miter lim="800000"/>
+          <a:miter/>
         </a:ln>
       </a:lnStyleLst>
       <a:effectStyleLst>
@@ -4853,6 +3765,27 @@
     </a:fmtScheme>
   </a:themeElements>
   <a:objectDefaults>
+    <a:spDef>
+      <a:spPr/>
+      <a:bodyPr/>
+      <a:lstStyle/>
+      <a:style>
+        <a:lnRef idx="2">
+          <a:schemeClr val="accent1">
+            <a:shade val="20000"/>
+          </a:schemeClr>
+        </a:lnRef>
+        <a:fillRef idx="1">
+          <a:schemeClr val="accent1"/>
+        </a:fillRef>
+        <a:effectRef idx="0">
+          <a:schemeClr val="accent1"/>
+        </a:effectRef>
+        <a:fontRef idx="minor">
+          <a:schemeClr val="lt1"/>
+        </a:fontRef>
+      </a:style>
+    </a:spDef>
     <a:lnDef>
       <a:spPr/>
       <a:bodyPr/>
@@ -4872,18 +3805,12 @@
         </a:fontRef>
       </a:style>
     </a:lnDef>
+    <a:txDef>
+      <a:spPr/>
+      <a:bodyPr/>
+      <a:lstStyle/>
+    </a:txDef>
   </a:objectDefaults>
   <a:extraClrSchemeLst/>
-  <a:extLst>
-    <a:ext uri="{05A4C25C-085E-4340-85A3-A5531E510DB2}">
-      <thm15:themeFamily xmlns:thm15="http://schemas.microsoft.com/office/thememl/2012/main" name="Office Theme" id="{2E142A2C-CD16-42D6-873A-C26D2A0506FA}" vid="{1BDDFF52-6CD6-40A5-AB3C-68EB2F1E4D0A}"/>
-    </a:ext>
-  </a:extLst>
 </a:theme>
-</file>
-
-<file path=docMetadata/LabelInfo.xml><?xml version="1.0" encoding="utf-8"?>
-<clbl:labelList xmlns:clbl="http://schemas.microsoft.com/office/2020/mipLabelMetadata">
-  <clbl:label id="{55e6bf14-f0cc-4b61-b411-2df49da90bc6}" enabled="1" method="Privileged" siteId="{4b50f211-1db9-4c8b-9949-db2761998fb9}" contentBits="0" removed="0"/>
-</clbl:labelList>
 </file>